--- a/Semester 3/PP/Week-1(PP).pptx
+++ b/Semester 3/PP/Week-1(PP).pptx
@@ -181,7 +181,7 @@
       </p:grpSpPr>
       <p:sp>
         <p:nvSpPr>
-          <p:cNvPr id="151255540" name="Header Placeholder 1"/>
+          <p:cNvPr id="1942554680" name="Header Placeholder 1"/>
           <p:cNvSpPr>
             <a:spLocks noGrp="1"/>
           </p:cNvSpPr>
@@ -215,7 +215,7 @@
       </p:sp>
       <p:sp>
         <p:nvSpPr>
-          <p:cNvPr id="1174752980" name="Date Placeholder 2"/>
+          <p:cNvPr id="1969698946" name="Date Placeholder 2"/>
           <p:cNvSpPr>
             <a:spLocks noGrp="1"/>
           </p:cNvSpPr>
@@ -253,7 +253,7 @@
       </p:sp>
       <p:sp>
         <p:nvSpPr>
-          <p:cNvPr id="728065028" name="Slide Image Placeholder 3"/>
+          <p:cNvPr id="657957391" name="Slide Image Placeholder 3"/>
           <p:cNvSpPr>
             <a:spLocks noChangeAspect="1" noGrp="1" noRot="1"/>
           </p:cNvSpPr>
@@ -289,7 +289,7 @@
       </p:sp>
       <p:sp>
         <p:nvSpPr>
-          <p:cNvPr id="1883283934" name="Notes Placeholder 4"/>
+          <p:cNvPr id="221820005" name="Notes Placeholder 4"/>
           <p:cNvSpPr>
             <a:spLocks noGrp="1"/>
           </p:cNvSpPr>
@@ -363,7 +363,7 @@
       </p:sp>
       <p:sp>
         <p:nvSpPr>
-          <p:cNvPr id="1751943538" name="Footer Placeholder 5"/>
+          <p:cNvPr id="552677435" name="Footer Placeholder 5"/>
           <p:cNvSpPr>
             <a:spLocks noGrp="1"/>
           </p:cNvSpPr>
@@ -397,7 +397,7 @@
       </p:sp>
       <p:sp>
         <p:nvSpPr>
-          <p:cNvPr id="200021583" name="Slide Number Placeholder 6"/>
+          <p:cNvPr id="1067189225" name="Slide Number Placeholder 6"/>
           <p:cNvSpPr>
             <a:spLocks noGrp="1"/>
           </p:cNvSpPr>
@@ -550,7 +550,7 @@
       </p:grpSpPr>
       <p:sp>
         <p:nvSpPr>
-          <p:cNvPr id="2" name="Slide Image Placeholder 1"/>
+          <p:cNvPr id="795215779" name="Slide Image Placeholder 1"/>
           <p:cNvSpPr>
             <a:spLocks noChangeAspect="1" noGrp="1" noRot="1"/>
           </p:cNvSpPr>
@@ -562,7 +562,7 @@
       </p:sp>
       <p:sp>
         <p:nvSpPr>
-          <p:cNvPr id="3" name="Notes Placeholder 2"/>
+          <p:cNvPr id="1977759399" name="Notes Placeholder 2"/>
           <p:cNvSpPr>
             <a:spLocks noGrp="1"/>
           </p:cNvSpPr>
@@ -584,7 +584,7 @@
       </p:sp>
       <p:sp>
         <p:nvSpPr>
-          <p:cNvPr id="4" name="Slide Number Placeholder 3"/>
+          <p:cNvPr id="214759368" name="Slide Number Placeholder 3"/>
           <p:cNvSpPr>
             <a:spLocks noGrp="1"/>
           </p:cNvSpPr>
@@ -635,7 +635,7 @@
       </p:grpSpPr>
       <p:sp>
         <p:nvSpPr>
-          <p:cNvPr id="2" name="Slide Image Placeholder 1"/>
+          <p:cNvPr id="953419917" name="Slide Image Placeholder 1"/>
           <p:cNvSpPr>
             <a:spLocks noChangeAspect="1" noGrp="1" noRot="1"/>
           </p:cNvSpPr>
@@ -647,7 +647,7 @@
       </p:sp>
       <p:sp>
         <p:nvSpPr>
-          <p:cNvPr id="3" name="Notes Placeholder 2"/>
+          <p:cNvPr id="919696839" name="Notes Placeholder 2"/>
           <p:cNvSpPr>
             <a:spLocks noGrp="1"/>
           </p:cNvSpPr>
@@ -669,7 +669,7 @@
       </p:sp>
       <p:sp>
         <p:nvSpPr>
-          <p:cNvPr id="4" name="Slide Number Placeholder 3"/>
+          <p:cNvPr id="969882279" name="Slide Number Placeholder 3"/>
           <p:cNvSpPr>
             <a:spLocks noGrp="1"/>
           </p:cNvSpPr>
@@ -720,7 +720,7 @@
       </p:grpSpPr>
       <p:sp>
         <p:nvSpPr>
-          <p:cNvPr id="2" name="Slide Image Placeholder 1"/>
+          <p:cNvPr id="1467286450" name="Slide Image Placeholder 1"/>
           <p:cNvSpPr>
             <a:spLocks noChangeAspect="1" noGrp="1" noRot="1"/>
           </p:cNvSpPr>
@@ -732,7 +732,7 @@
       </p:sp>
       <p:sp>
         <p:nvSpPr>
-          <p:cNvPr id="3" name="Notes Placeholder 2"/>
+          <p:cNvPr id="1965736373" name="Notes Placeholder 2"/>
           <p:cNvSpPr>
             <a:spLocks noGrp="1"/>
           </p:cNvSpPr>
@@ -754,7 +754,7 @@
       </p:sp>
       <p:sp>
         <p:nvSpPr>
-          <p:cNvPr id="4" name="Slide Number Placeholder 3"/>
+          <p:cNvPr id="2009053701" name="Slide Number Placeholder 3"/>
           <p:cNvSpPr>
             <a:spLocks noGrp="1"/>
           </p:cNvSpPr>
@@ -805,7 +805,7 @@
       </p:grpSpPr>
       <p:sp>
         <p:nvSpPr>
-          <p:cNvPr id="2" name="Slide Image Placeholder 1"/>
+          <p:cNvPr id="1547893642" name="Slide Image Placeholder 1"/>
           <p:cNvSpPr>
             <a:spLocks noChangeAspect="1" noGrp="1" noRot="1"/>
           </p:cNvSpPr>
@@ -817,7 +817,7 @@
       </p:sp>
       <p:sp>
         <p:nvSpPr>
-          <p:cNvPr id="3" name="Notes Placeholder 2"/>
+          <p:cNvPr id="1475746860" name="Notes Placeholder 2"/>
           <p:cNvSpPr>
             <a:spLocks noGrp="1"/>
           </p:cNvSpPr>
@@ -839,7 +839,7 @@
       </p:sp>
       <p:sp>
         <p:nvSpPr>
-          <p:cNvPr id="4" name="Slide Number Placeholder 3"/>
+          <p:cNvPr id="1576428400" name="Slide Number Placeholder 3"/>
           <p:cNvSpPr>
             <a:spLocks noGrp="1"/>
           </p:cNvSpPr>
@@ -890,7 +890,7 @@
       </p:grpSpPr>
       <p:sp>
         <p:nvSpPr>
-          <p:cNvPr id="2" name="Slide Image Placeholder 1"/>
+          <p:cNvPr id="284017036" name="Slide Image Placeholder 1"/>
           <p:cNvSpPr>
             <a:spLocks noChangeAspect="1" noGrp="1" noRot="1"/>
           </p:cNvSpPr>
@@ -902,7 +902,7 @@
       </p:sp>
       <p:sp>
         <p:nvSpPr>
-          <p:cNvPr id="3" name="Notes Placeholder 2"/>
+          <p:cNvPr id="1939269334" name="Notes Placeholder 2"/>
           <p:cNvSpPr>
             <a:spLocks noGrp="1"/>
           </p:cNvSpPr>
@@ -924,7 +924,7 @@
       </p:sp>
       <p:sp>
         <p:nvSpPr>
-          <p:cNvPr id="4" name="Slide Number Placeholder 3"/>
+          <p:cNvPr id="1627358863" name="Slide Number Placeholder 3"/>
           <p:cNvSpPr>
             <a:spLocks noGrp="1"/>
           </p:cNvSpPr>
@@ -975,7 +975,7 @@
       </p:grpSpPr>
       <p:sp>
         <p:nvSpPr>
-          <p:cNvPr id="2" name="Slide Image Placeholder 1"/>
+          <p:cNvPr id="728619837" name="Slide Image Placeholder 1"/>
           <p:cNvSpPr>
             <a:spLocks noChangeAspect="1" noGrp="1" noRot="1"/>
           </p:cNvSpPr>
@@ -987,7 +987,7 @@
       </p:sp>
       <p:sp>
         <p:nvSpPr>
-          <p:cNvPr id="3" name="Notes Placeholder 2"/>
+          <p:cNvPr id="561827764" name="Notes Placeholder 2"/>
           <p:cNvSpPr>
             <a:spLocks noGrp="1"/>
           </p:cNvSpPr>
@@ -1009,7 +1009,7 @@
       </p:sp>
       <p:sp>
         <p:nvSpPr>
-          <p:cNvPr id="4" name="Slide Number Placeholder 3"/>
+          <p:cNvPr id="1129654283" name="Slide Number Placeholder 3"/>
           <p:cNvSpPr>
             <a:spLocks noGrp="1"/>
           </p:cNvSpPr>
@@ -1060,7 +1060,7 @@
       </p:grpSpPr>
       <p:sp>
         <p:nvSpPr>
-          <p:cNvPr id="2" name="Slide Image Placeholder 1"/>
+          <p:cNvPr id="818386851" name="Slide Image Placeholder 1"/>
           <p:cNvSpPr>
             <a:spLocks noChangeAspect="1" noGrp="1" noRot="1"/>
           </p:cNvSpPr>
@@ -1072,7 +1072,7 @@
       </p:sp>
       <p:sp>
         <p:nvSpPr>
-          <p:cNvPr id="3" name="Notes Placeholder 2"/>
+          <p:cNvPr id="390992943" name="Notes Placeholder 2"/>
           <p:cNvSpPr>
             <a:spLocks noGrp="1"/>
           </p:cNvSpPr>
@@ -1094,7 +1094,7 @@
       </p:sp>
       <p:sp>
         <p:nvSpPr>
-          <p:cNvPr id="4" name="Slide Number Placeholder 3"/>
+          <p:cNvPr id="173684645" name="Slide Number Placeholder 3"/>
           <p:cNvSpPr>
             <a:spLocks noGrp="1"/>
           </p:cNvSpPr>
@@ -1145,7 +1145,7 @@
       </p:grpSpPr>
       <p:sp>
         <p:nvSpPr>
-          <p:cNvPr id="2" name="Slide Image Placeholder 1"/>
+          <p:cNvPr id="1215780616" name="Slide Image Placeholder 1"/>
           <p:cNvSpPr>
             <a:spLocks noChangeAspect="1" noGrp="1" noRot="1"/>
           </p:cNvSpPr>
@@ -1157,7 +1157,7 @@
       </p:sp>
       <p:sp>
         <p:nvSpPr>
-          <p:cNvPr id="3" name="Notes Placeholder 2"/>
+          <p:cNvPr id="999478192" name="Notes Placeholder 2"/>
           <p:cNvSpPr>
             <a:spLocks noGrp="1"/>
           </p:cNvSpPr>
@@ -1179,7 +1179,7 @@
       </p:sp>
       <p:sp>
         <p:nvSpPr>
-          <p:cNvPr id="4" name="Slide Number Placeholder 3"/>
+          <p:cNvPr id="871073104" name="Slide Number Placeholder 3"/>
           <p:cNvSpPr>
             <a:spLocks noGrp="1"/>
           </p:cNvSpPr>
@@ -1230,7 +1230,7 @@
       </p:grpSpPr>
       <p:sp>
         <p:nvSpPr>
-          <p:cNvPr id="2" name="Slide Image Placeholder 1"/>
+          <p:cNvPr id="1718432733" name="Slide Image Placeholder 1"/>
           <p:cNvSpPr>
             <a:spLocks noChangeAspect="1" noGrp="1" noRot="1"/>
           </p:cNvSpPr>
@@ -1242,7 +1242,7 @@
       </p:sp>
       <p:sp>
         <p:nvSpPr>
-          <p:cNvPr id="3" name="Notes Placeholder 2"/>
+          <p:cNvPr id="2030063048" name="Notes Placeholder 2"/>
           <p:cNvSpPr>
             <a:spLocks noGrp="1"/>
           </p:cNvSpPr>
@@ -1264,7 +1264,7 @@
       </p:sp>
       <p:sp>
         <p:nvSpPr>
-          <p:cNvPr id="4" name="Slide Number Placeholder 3"/>
+          <p:cNvPr id="820438799" name="Slide Number Placeholder 3"/>
           <p:cNvSpPr>
             <a:spLocks noGrp="1"/>
           </p:cNvSpPr>
@@ -1315,7 +1315,7 @@
       </p:grpSpPr>
       <p:sp>
         <p:nvSpPr>
-          <p:cNvPr id="2" name="Slide Image Placeholder 1"/>
+          <p:cNvPr id="1008024153" name="Slide Image Placeholder 1"/>
           <p:cNvSpPr>
             <a:spLocks noChangeAspect="1" noGrp="1" noRot="1"/>
           </p:cNvSpPr>
@@ -1327,7 +1327,7 @@
       </p:sp>
       <p:sp>
         <p:nvSpPr>
-          <p:cNvPr id="3" name="Notes Placeholder 2"/>
+          <p:cNvPr id="1520413119" name="Notes Placeholder 2"/>
           <p:cNvSpPr>
             <a:spLocks noGrp="1"/>
           </p:cNvSpPr>
@@ -1349,7 +1349,7 @@
       </p:sp>
       <p:sp>
         <p:nvSpPr>
-          <p:cNvPr id="4" name="Slide Number Placeholder 3"/>
+          <p:cNvPr id="1421035566" name="Slide Number Placeholder 3"/>
           <p:cNvSpPr>
             <a:spLocks noGrp="1"/>
           </p:cNvSpPr>
@@ -1400,7 +1400,7 @@
       </p:grpSpPr>
       <p:sp>
         <p:nvSpPr>
-          <p:cNvPr id="2" name="Slide Image Placeholder 1"/>
+          <p:cNvPr id="654450692" name="Slide Image Placeholder 1"/>
           <p:cNvSpPr>
             <a:spLocks noChangeAspect="1" noGrp="1" noRot="1"/>
           </p:cNvSpPr>
@@ -1412,7 +1412,7 @@
       </p:sp>
       <p:sp>
         <p:nvSpPr>
-          <p:cNvPr id="3" name="Notes Placeholder 2"/>
+          <p:cNvPr id="71363636" name="Notes Placeholder 2"/>
           <p:cNvSpPr>
             <a:spLocks noGrp="1"/>
           </p:cNvSpPr>
@@ -1434,7 +1434,7 @@
       </p:sp>
       <p:sp>
         <p:nvSpPr>
-          <p:cNvPr id="4" name="Slide Number Placeholder 3"/>
+          <p:cNvPr id="1052023546" name="Slide Number Placeholder 3"/>
           <p:cNvSpPr>
             <a:spLocks noGrp="1"/>
           </p:cNvSpPr>
@@ -1485,7 +1485,7 @@
       </p:grpSpPr>
       <p:sp>
         <p:nvSpPr>
-          <p:cNvPr id="2" name="Slide Image Placeholder 1"/>
+          <p:cNvPr id="868637082" name="Slide Image Placeholder 1"/>
           <p:cNvSpPr>
             <a:spLocks noChangeAspect="1" noGrp="1" noRot="1"/>
           </p:cNvSpPr>
@@ -1497,7 +1497,7 @@
       </p:sp>
       <p:sp>
         <p:nvSpPr>
-          <p:cNvPr id="3" name="Notes Placeholder 2"/>
+          <p:cNvPr id="1715209042" name="Notes Placeholder 2"/>
           <p:cNvSpPr>
             <a:spLocks noGrp="1"/>
           </p:cNvSpPr>
@@ -1519,7 +1519,7 @@
       </p:sp>
       <p:sp>
         <p:nvSpPr>
-          <p:cNvPr id="4" name="Slide Number Placeholder 3"/>
+          <p:cNvPr id="143602044" name="Slide Number Placeholder 3"/>
           <p:cNvSpPr>
             <a:spLocks noGrp="1"/>
           </p:cNvSpPr>
@@ -1570,7 +1570,7 @@
       </p:grpSpPr>
       <p:sp>
         <p:nvSpPr>
-          <p:cNvPr id="2" name="Slide Image Placeholder 1"/>
+          <p:cNvPr id="1393101072" name="Slide Image Placeholder 1"/>
           <p:cNvSpPr>
             <a:spLocks noChangeAspect="1" noGrp="1" noRot="1"/>
           </p:cNvSpPr>
@@ -1582,7 +1582,7 @@
       </p:sp>
       <p:sp>
         <p:nvSpPr>
-          <p:cNvPr id="3" name="Notes Placeholder 2"/>
+          <p:cNvPr id="331153888" name="Notes Placeholder 2"/>
           <p:cNvSpPr>
             <a:spLocks noGrp="1"/>
           </p:cNvSpPr>
@@ -1604,7 +1604,7 @@
       </p:sp>
       <p:sp>
         <p:nvSpPr>
-          <p:cNvPr id="4" name="Slide Number Placeholder 3"/>
+          <p:cNvPr id="1547083028" name="Slide Number Placeholder 3"/>
           <p:cNvSpPr>
             <a:spLocks noGrp="1"/>
           </p:cNvSpPr>
@@ -1655,7 +1655,7 @@
       </p:grpSpPr>
       <p:sp>
         <p:nvSpPr>
-          <p:cNvPr id="2" name="Slide Image Placeholder 1"/>
+          <p:cNvPr id="1806032991" name="Slide Image Placeholder 1"/>
           <p:cNvSpPr>
             <a:spLocks noChangeAspect="1" noGrp="1" noRot="1"/>
           </p:cNvSpPr>
@@ -1667,7 +1667,7 @@
       </p:sp>
       <p:sp>
         <p:nvSpPr>
-          <p:cNvPr id="3" name="Notes Placeholder 2"/>
+          <p:cNvPr id="1736500302" name="Notes Placeholder 2"/>
           <p:cNvSpPr>
             <a:spLocks noGrp="1"/>
           </p:cNvSpPr>
@@ -1689,7 +1689,7 @@
       </p:sp>
       <p:sp>
         <p:nvSpPr>
-          <p:cNvPr id="4" name="Slide Number Placeholder 3"/>
+          <p:cNvPr id="266710431" name="Slide Number Placeholder 3"/>
           <p:cNvSpPr>
             <a:spLocks noGrp="1"/>
           </p:cNvSpPr>
@@ -1740,7 +1740,7 @@
       </p:grpSpPr>
       <p:sp>
         <p:nvSpPr>
-          <p:cNvPr id="2" name="Slide Image Placeholder 1"/>
+          <p:cNvPr id="1761931217" name="Slide Image Placeholder 1"/>
           <p:cNvSpPr>
             <a:spLocks noChangeAspect="1" noGrp="1" noRot="1"/>
           </p:cNvSpPr>
@@ -1752,7 +1752,7 @@
       </p:sp>
       <p:sp>
         <p:nvSpPr>
-          <p:cNvPr id="3" name="Notes Placeholder 2"/>
+          <p:cNvPr id="363857590" name="Notes Placeholder 2"/>
           <p:cNvSpPr>
             <a:spLocks noGrp="1"/>
           </p:cNvSpPr>
@@ -1774,7 +1774,7 @@
       </p:sp>
       <p:sp>
         <p:nvSpPr>
-          <p:cNvPr id="4" name="Slide Number Placeholder 3"/>
+          <p:cNvPr id="26788749" name="Slide Number Placeholder 3"/>
           <p:cNvSpPr>
             <a:spLocks noGrp="1"/>
           </p:cNvSpPr>
@@ -1825,7 +1825,7 @@
       </p:grpSpPr>
       <p:sp>
         <p:nvSpPr>
-          <p:cNvPr id="2" name="Slide Image Placeholder 1"/>
+          <p:cNvPr id="93924838" name="Slide Image Placeholder 1"/>
           <p:cNvSpPr>
             <a:spLocks noChangeAspect="1" noGrp="1" noRot="1"/>
           </p:cNvSpPr>
@@ -1837,7 +1837,7 @@
       </p:sp>
       <p:sp>
         <p:nvSpPr>
-          <p:cNvPr id="3" name="Notes Placeholder 2"/>
+          <p:cNvPr id="1594295389" name="Notes Placeholder 2"/>
           <p:cNvSpPr>
             <a:spLocks noGrp="1"/>
           </p:cNvSpPr>
@@ -1859,7 +1859,7 @@
       </p:sp>
       <p:sp>
         <p:nvSpPr>
-          <p:cNvPr id="4" name="Slide Number Placeholder 3"/>
+          <p:cNvPr id="952774619" name="Slide Number Placeholder 3"/>
           <p:cNvSpPr>
             <a:spLocks noGrp="1"/>
           </p:cNvSpPr>
@@ -1910,7 +1910,7 @@
       </p:grpSpPr>
       <p:sp>
         <p:nvSpPr>
-          <p:cNvPr id="2" name="Slide Image Placeholder 1"/>
+          <p:cNvPr id="2117881926" name="Slide Image Placeholder 1"/>
           <p:cNvSpPr>
             <a:spLocks noChangeAspect="1" noGrp="1" noRot="1"/>
           </p:cNvSpPr>
@@ -1922,7 +1922,7 @@
       </p:sp>
       <p:sp>
         <p:nvSpPr>
-          <p:cNvPr id="3" name="Notes Placeholder 2"/>
+          <p:cNvPr id="1913708343" name="Notes Placeholder 2"/>
           <p:cNvSpPr>
             <a:spLocks noGrp="1"/>
           </p:cNvSpPr>
@@ -1944,7 +1944,7 @@
       </p:sp>
       <p:sp>
         <p:nvSpPr>
-          <p:cNvPr id="4" name="Slide Number Placeholder 3"/>
+          <p:cNvPr id="367227863" name="Slide Number Placeholder 3"/>
           <p:cNvSpPr>
             <a:spLocks noGrp="1"/>
           </p:cNvSpPr>
@@ -1995,7 +1995,7 @@
       </p:grpSpPr>
       <p:sp>
         <p:nvSpPr>
-          <p:cNvPr id="1862354961" name="Slide Image Placeholder 1"/>
+          <p:cNvPr id="520781413" name="Slide Image Placeholder 1"/>
           <p:cNvSpPr>
             <a:spLocks noChangeAspect="1" noGrp="1" noRot="1"/>
           </p:cNvSpPr>
@@ -2007,7 +2007,7 @@
       </p:sp>
       <p:sp>
         <p:nvSpPr>
-          <p:cNvPr id="1481066785" name="Notes Placeholder 2"/>
+          <p:cNvPr id="2033747397" name="Notes Placeholder 2"/>
           <p:cNvSpPr>
             <a:spLocks noGrp="1"/>
           </p:cNvSpPr>
@@ -2029,7 +2029,7 @@
       </p:sp>
       <p:sp>
         <p:nvSpPr>
-          <p:cNvPr id="294444256" name="Slide Number Placeholder 3"/>
+          <p:cNvPr id="1981187539" name="Slide Number Placeholder 3"/>
           <p:cNvSpPr>
             <a:spLocks noGrp="1"/>
           </p:cNvSpPr>
@@ -2080,7 +2080,7 @@
       </p:grpSpPr>
       <p:sp>
         <p:nvSpPr>
-          <p:cNvPr id="2" name="Slide Image Placeholder 1"/>
+          <p:cNvPr id="1600941939" name="Slide Image Placeholder 1"/>
           <p:cNvSpPr>
             <a:spLocks noChangeAspect="1" noGrp="1" noRot="1"/>
           </p:cNvSpPr>
@@ -2092,7 +2092,7 @@
       </p:sp>
       <p:sp>
         <p:nvSpPr>
-          <p:cNvPr id="3" name="Notes Placeholder 2"/>
+          <p:cNvPr id="2027938226" name="Notes Placeholder 2"/>
           <p:cNvSpPr>
             <a:spLocks noGrp="1"/>
           </p:cNvSpPr>
@@ -2114,7 +2114,7 @@
       </p:sp>
       <p:sp>
         <p:nvSpPr>
-          <p:cNvPr id="4" name="Slide Number Placeholder 3"/>
+          <p:cNvPr id="355523513" name="Slide Number Placeholder 3"/>
           <p:cNvSpPr>
             <a:spLocks noGrp="1"/>
           </p:cNvSpPr>
@@ -2165,7 +2165,7 @@
       </p:grpSpPr>
       <p:sp>
         <p:nvSpPr>
-          <p:cNvPr id="2" name="Slide Image Placeholder 1"/>
+          <p:cNvPr id="1797190434" name="Slide Image Placeholder 1"/>
           <p:cNvSpPr>
             <a:spLocks noChangeAspect="1" noGrp="1" noRot="1"/>
           </p:cNvSpPr>
@@ -2177,7 +2177,7 @@
       </p:sp>
       <p:sp>
         <p:nvSpPr>
-          <p:cNvPr id="3" name="Notes Placeholder 2"/>
+          <p:cNvPr id="2059306110" name="Notes Placeholder 2"/>
           <p:cNvSpPr>
             <a:spLocks noGrp="1"/>
           </p:cNvSpPr>
@@ -2199,7 +2199,7 @@
       </p:sp>
       <p:sp>
         <p:nvSpPr>
-          <p:cNvPr id="4" name="Slide Number Placeholder 3"/>
+          <p:cNvPr id="1075559606" name="Slide Number Placeholder 3"/>
           <p:cNvSpPr>
             <a:spLocks noGrp="1"/>
           </p:cNvSpPr>
@@ -2250,7 +2250,7 @@
       </p:grpSpPr>
       <p:sp>
         <p:nvSpPr>
-          <p:cNvPr id="2" name="Slide Image Placeholder 1"/>
+          <p:cNvPr id="1090017379" name="Slide Image Placeholder 1"/>
           <p:cNvSpPr>
             <a:spLocks noChangeAspect="1" noGrp="1" noRot="1"/>
           </p:cNvSpPr>
@@ -2262,7 +2262,7 @@
       </p:sp>
       <p:sp>
         <p:nvSpPr>
-          <p:cNvPr id="3" name="Notes Placeholder 2"/>
+          <p:cNvPr id="266556857" name="Notes Placeholder 2"/>
           <p:cNvSpPr>
             <a:spLocks noGrp="1"/>
           </p:cNvSpPr>
@@ -2284,7 +2284,7 @@
       </p:sp>
       <p:sp>
         <p:nvSpPr>
-          <p:cNvPr id="4" name="Slide Number Placeholder 3"/>
+          <p:cNvPr id="1142462990" name="Slide Number Placeholder 3"/>
           <p:cNvSpPr>
             <a:spLocks noGrp="1"/>
           </p:cNvSpPr>
@@ -2335,7 +2335,7 @@
       </p:grpSpPr>
       <p:sp>
         <p:nvSpPr>
-          <p:cNvPr id="2" name="Slide Image Placeholder 1"/>
+          <p:cNvPr id="226468805" name="Slide Image Placeholder 1"/>
           <p:cNvSpPr>
             <a:spLocks noChangeAspect="1" noGrp="1" noRot="1"/>
           </p:cNvSpPr>
@@ -2347,7 +2347,7 @@
       </p:sp>
       <p:sp>
         <p:nvSpPr>
-          <p:cNvPr id="3" name="Notes Placeholder 2"/>
+          <p:cNvPr id="184582166" name="Notes Placeholder 2"/>
           <p:cNvSpPr>
             <a:spLocks noGrp="1"/>
           </p:cNvSpPr>
@@ -2369,7 +2369,7 @@
       </p:sp>
       <p:sp>
         <p:nvSpPr>
-          <p:cNvPr id="4" name="Slide Number Placeholder 3"/>
+          <p:cNvPr id="723819657" name="Slide Number Placeholder 3"/>
           <p:cNvSpPr>
             <a:spLocks noGrp="1"/>
           </p:cNvSpPr>
@@ -2420,7 +2420,7 @@
       </p:grpSpPr>
       <p:sp>
         <p:nvSpPr>
-          <p:cNvPr id="2" name="Slide Image Placeholder 1"/>
+          <p:cNvPr id="1875208070" name="Slide Image Placeholder 1"/>
           <p:cNvSpPr>
             <a:spLocks noChangeAspect="1" noGrp="1" noRot="1"/>
           </p:cNvSpPr>
@@ -2432,7 +2432,7 @@
       </p:sp>
       <p:sp>
         <p:nvSpPr>
-          <p:cNvPr id="3" name="Notes Placeholder 2"/>
+          <p:cNvPr id="327520541" name="Notes Placeholder 2"/>
           <p:cNvSpPr>
             <a:spLocks noGrp="1"/>
           </p:cNvSpPr>
@@ -2454,7 +2454,7 @@
       </p:sp>
       <p:sp>
         <p:nvSpPr>
-          <p:cNvPr id="4" name="Slide Number Placeholder 3"/>
+          <p:cNvPr id="1639982412" name="Slide Number Placeholder 3"/>
           <p:cNvSpPr>
             <a:spLocks noGrp="1"/>
           </p:cNvSpPr>
@@ -2505,7 +2505,7 @@
       </p:grpSpPr>
       <p:sp>
         <p:nvSpPr>
-          <p:cNvPr id="2" name="Slide Image Placeholder 1"/>
+          <p:cNvPr id="263478822" name="Slide Image Placeholder 1"/>
           <p:cNvSpPr>
             <a:spLocks noChangeAspect="1" noGrp="1" noRot="1"/>
           </p:cNvSpPr>
@@ -2517,7 +2517,7 @@
       </p:sp>
       <p:sp>
         <p:nvSpPr>
-          <p:cNvPr id="3" name="Notes Placeholder 2"/>
+          <p:cNvPr id="1834791789" name="Notes Placeholder 2"/>
           <p:cNvSpPr>
             <a:spLocks noGrp="1"/>
           </p:cNvSpPr>
@@ -2539,7 +2539,7 @@
       </p:sp>
       <p:sp>
         <p:nvSpPr>
-          <p:cNvPr id="4" name="Slide Number Placeholder 3"/>
+          <p:cNvPr id="1124577807" name="Slide Number Placeholder 3"/>
           <p:cNvSpPr>
             <a:spLocks noGrp="1"/>
           </p:cNvSpPr>
@@ -2590,7 +2590,7 @@
       </p:grpSpPr>
       <p:sp>
         <p:nvSpPr>
-          <p:cNvPr id="1538657278" name="Slide Image Placeholder 1"/>
+          <p:cNvPr id="1000723484" name="Slide Image Placeholder 1"/>
           <p:cNvSpPr>
             <a:spLocks noChangeAspect="1" noGrp="1" noRot="1"/>
           </p:cNvSpPr>
@@ -2602,7 +2602,7 @@
       </p:sp>
       <p:sp>
         <p:nvSpPr>
-          <p:cNvPr id="1233917084" name="Notes Placeholder 2"/>
+          <p:cNvPr id="238820096" name="Notes Placeholder 2"/>
           <p:cNvSpPr>
             <a:spLocks noGrp="1"/>
           </p:cNvSpPr>
@@ -2624,7 +2624,7 @@
       </p:sp>
       <p:sp>
         <p:nvSpPr>
-          <p:cNvPr id="170301518" name="Slide Number Placeholder 3"/>
+          <p:cNvPr id="1019259855" name="Slide Number Placeholder 3"/>
           <p:cNvSpPr>
             <a:spLocks noGrp="1"/>
           </p:cNvSpPr>
@@ -2675,7 +2675,7 @@
       </p:grpSpPr>
       <p:sp>
         <p:nvSpPr>
-          <p:cNvPr id="2" name="Slide Image Placeholder 1"/>
+          <p:cNvPr id="109824592" name="Slide Image Placeholder 1"/>
           <p:cNvSpPr>
             <a:spLocks noChangeAspect="1" noGrp="1" noRot="1"/>
           </p:cNvSpPr>
@@ -2687,7 +2687,7 @@
       </p:sp>
       <p:sp>
         <p:nvSpPr>
-          <p:cNvPr id="3" name="Notes Placeholder 2"/>
+          <p:cNvPr id="1766916394" name="Notes Placeholder 2"/>
           <p:cNvSpPr>
             <a:spLocks noGrp="1"/>
           </p:cNvSpPr>
@@ -2709,7 +2709,7 @@
       </p:sp>
       <p:sp>
         <p:nvSpPr>
-          <p:cNvPr id="4" name="Slide Number Placeholder 3"/>
+          <p:cNvPr id="840621481" name="Slide Number Placeholder 3"/>
           <p:cNvSpPr>
             <a:spLocks noGrp="1"/>
           </p:cNvSpPr>
@@ -2760,7 +2760,7 @@
       </p:grpSpPr>
       <p:sp>
         <p:nvSpPr>
-          <p:cNvPr id="2" name="Slide Image Placeholder 1"/>
+          <p:cNvPr id="1926269605" name="Slide Image Placeholder 1"/>
           <p:cNvSpPr>
             <a:spLocks noChangeAspect="1" noGrp="1" noRot="1"/>
           </p:cNvSpPr>
@@ -2772,7 +2772,7 @@
       </p:sp>
       <p:sp>
         <p:nvSpPr>
-          <p:cNvPr id="3" name="Notes Placeholder 2"/>
+          <p:cNvPr id="1427811530" name="Notes Placeholder 2"/>
           <p:cNvSpPr>
             <a:spLocks noGrp="1"/>
           </p:cNvSpPr>
@@ -2794,7 +2794,7 @@
       </p:sp>
       <p:sp>
         <p:nvSpPr>
-          <p:cNvPr id="4" name="Slide Number Placeholder 3"/>
+          <p:cNvPr id="1026299346" name="Slide Number Placeholder 3"/>
           <p:cNvSpPr>
             <a:spLocks noGrp="1"/>
           </p:cNvSpPr>
@@ -2845,7 +2845,7 @@
       </p:grpSpPr>
       <p:sp>
         <p:nvSpPr>
-          <p:cNvPr id="2" name="Slide Image Placeholder 1"/>
+          <p:cNvPr id="2131202160" name="Slide Image Placeholder 1"/>
           <p:cNvSpPr>
             <a:spLocks noChangeAspect="1" noGrp="1" noRot="1"/>
           </p:cNvSpPr>
@@ -2857,7 +2857,7 @@
       </p:sp>
       <p:sp>
         <p:nvSpPr>
-          <p:cNvPr id="3" name="Notes Placeholder 2"/>
+          <p:cNvPr id="120259036" name="Notes Placeholder 2"/>
           <p:cNvSpPr>
             <a:spLocks noGrp="1"/>
           </p:cNvSpPr>
@@ -2879,7 +2879,7 @@
       </p:sp>
       <p:sp>
         <p:nvSpPr>
-          <p:cNvPr id="4" name="Slide Number Placeholder 3"/>
+          <p:cNvPr id="470176525" name="Slide Number Placeholder 3"/>
           <p:cNvSpPr>
             <a:spLocks noGrp="1"/>
           </p:cNvSpPr>
@@ -2930,7 +2930,7 @@
       </p:grpSpPr>
       <p:sp>
         <p:nvSpPr>
-          <p:cNvPr id="2" name="Slide Image Placeholder 1"/>
+          <p:cNvPr id="339154171" name="Slide Image Placeholder 1"/>
           <p:cNvSpPr>
             <a:spLocks noChangeAspect="1" noGrp="1" noRot="1"/>
           </p:cNvSpPr>
@@ -2942,7 +2942,7 @@
       </p:sp>
       <p:sp>
         <p:nvSpPr>
-          <p:cNvPr id="3" name="Notes Placeholder 2"/>
+          <p:cNvPr id="191713360" name="Notes Placeholder 2"/>
           <p:cNvSpPr>
             <a:spLocks noGrp="1"/>
           </p:cNvSpPr>
@@ -2964,7 +2964,7 @@
       </p:sp>
       <p:sp>
         <p:nvSpPr>
-          <p:cNvPr id="4" name="Slide Number Placeholder 3"/>
+          <p:cNvPr id="892929251" name="Slide Number Placeholder 3"/>
           <p:cNvSpPr>
             <a:spLocks noGrp="1"/>
           </p:cNvSpPr>
@@ -3015,7 +3015,7 @@
       </p:grpSpPr>
       <p:sp>
         <p:nvSpPr>
-          <p:cNvPr id="2" name="Slide Image Placeholder 1"/>
+          <p:cNvPr id="397734229" name="Slide Image Placeholder 1"/>
           <p:cNvSpPr>
             <a:spLocks noChangeAspect="1" noGrp="1" noRot="1"/>
           </p:cNvSpPr>
@@ -3027,7 +3027,7 @@
       </p:sp>
       <p:sp>
         <p:nvSpPr>
-          <p:cNvPr id="3" name="Notes Placeholder 2"/>
+          <p:cNvPr id="1583739138" name="Notes Placeholder 2"/>
           <p:cNvSpPr>
             <a:spLocks noGrp="1"/>
           </p:cNvSpPr>
@@ -3049,7 +3049,7 @@
       </p:sp>
       <p:sp>
         <p:nvSpPr>
-          <p:cNvPr id="4" name="Slide Number Placeholder 3"/>
+          <p:cNvPr id="1447931776" name="Slide Number Placeholder 3"/>
           <p:cNvSpPr>
             <a:spLocks noGrp="1"/>
           </p:cNvSpPr>
@@ -3100,7 +3100,7 @@
       </p:grpSpPr>
       <p:sp>
         <p:nvSpPr>
-          <p:cNvPr id="2" name="Slide Image Placeholder 1"/>
+          <p:cNvPr id="1749606662" name="Slide Image Placeholder 1"/>
           <p:cNvSpPr>
             <a:spLocks noChangeAspect="1" noGrp="1" noRot="1"/>
           </p:cNvSpPr>
@@ -3112,7 +3112,7 @@
       </p:sp>
       <p:sp>
         <p:nvSpPr>
-          <p:cNvPr id="3" name="Notes Placeholder 2"/>
+          <p:cNvPr id="505158873" name="Notes Placeholder 2"/>
           <p:cNvSpPr>
             <a:spLocks noGrp="1"/>
           </p:cNvSpPr>
@@ -3134,7 +3134,7 @@
       </p:sp>
       <p:sp>
         <p:nvSpPr>
-          <p:cNvPr id="4" name="Slide Number Placeholder 3"/>
+          <p:cNvPr id="486396323" name="Slide Number Placeholder 3"/>
           <p:cNvSpPr>
             <a:spLocks noGrp="1"/>
           </p:cNvSpPr>
@@ -3185,7 +3185,7 @@
       </p:grpSpPr>
       <p:sp>
         <p:nvSpPr>
-          <p:cNvPr id="2" name="Slide Image Placeholder 1"/>
+          <p:cNvPr id="907791317" name="Slide Image Placeholder 1"/>
           <p:cNvSpPr>
             <a:spLocks noChangeAspect="1" noGrp="1" noRot="1"/>
           </p:cNvSpPr>
@@ -3197,7 +3197,7 @@
       </p:sp>
       <p:sp>
         <p:nvSpPr>
-          <p:cNvPr id="3" name="Notes Placeholder 2"/>
+          <p:cNvPr id="1184080830" name="Notes Placeholder 2"/>
           <p:cNvSpPr>
             <a:spLocks noGrp="1"/>
           </p:cNvSpPr>
@@ -3219,7 +3219,7 @@
       </p:sp>
       <p:sp>
         <p:nvSpPr>
-          <p:cNvPr id="4" name="Slide Number Placeholder 3"/>
+          <p:cNvPr id="1680798375" name="Slide Number Placeholder 3"/>
           <p:cNvSpPr>
             <a:spLocks noGrp="1"/>
           </p:cNvSpPr>
@@ -3270,7 +3270,7 @@
       </p:grpSpPr>
       <p:sp>
         <p:nvSpPr>
-          <p:cNvPr id="2" name="Slide Image Placeholder 1"/>
+          <p:cNvPr id="1830584206" name="Slide Image Placeholder 1"/>
           <p:cNvSpPr>
             <a:spLocks noChangeAspect="1" noGrp="1" noRot="1"/>
           </p:cNvSpPr>
@@ -3282,7 +3282,7 @@
       </p:sp>
       <p:sp>
         <p:nvSpPr>
-          <p:cNvPr id="3" name="Notes Placeholder 2"/>
+          <p:cNvPr id="1289935415" name="Notes Placeholder 2"/>
           <p:cNvSpPr>
             <a:spLocks noGrp="1"/>
           </p:cNvSpPr>
@@ -3304,7 +3304,7 @@
       </p:sp>
       <p:sp>
         <p:nvSpPr>
-          <p:cNvPr id="4" name="Slide Number Placeholder 3"/>
+          <p:cNvPr id="468869992" name="Slide Number Placeholder 3"/>
           <p:cNvSpPr>
             <a:spLocks noGrp="1"/>
           </p:cNvSpPr>
@@ -3355,7 +3355,7 @@
       </p:grpSpPr>
       <p:sp>
         <p:nvSpPr>
-          <p:cNvPr id="1422400435" name="Slide Image Placeholder 1"/>
+          <p:cNvPr id="2120745139" name="Slide Image Placeholder 1"/>
           <p:cNvSpPr>
             <a:spLocks noChangeAspect="1" noGrp="1" noRot="1"/>
           </p:cNvSpPr>
@@ -3367,7 +3367,7 @@
       </p:sp>
       <p:sp>
         <p:nvSpPr>
-          <p:cNvPr id="1450098180" name="Notes Placeholder 2"/>
+          <p:cNvPr id="143108410" name="Notes Placeholder 2"/>
           <p:cNvSpPr>
             <a:spLocks noGrp="1"/>
           </p:cNvSpPr>
@@ -3389,7 +3389,7 @@
       </p:sp>
       <p:sp>
         <p:nvSpPr>
-          <p:cNvPr id="1520593354" name="Slide Number Placeholder 3"/>
+          <p:cNvPr id="985754723" name="Slide Number Placeholder 3"/>
           <p:cNvSpPr>
             <a:spLocks noGrp="1"/>
           </p:cNvSpPr>
@@ -3440,7 +3440,7 @@
       </p:grpSpPr>
       <p:sp>
         <p:nvSpPr>
-          <p:cNvPr id="2" name="Slide Image Placeholder 1"/>
+          <p:cNvPr id="1183859602" name="Slide Image Placeholder 1"/>
           <p:cNvSpPr>
             <a:spLocks noChangeAspect="1" noGrp="1" noRot="1"/>
           </p:cNvSpPr>
@@ -3452,7 +3452,7 @@
       </p:sp>
       <p:sp>
         <p:nvSpPr>
-          <p:cNvPr id="3" name="Notes Placeholder 2"/>
+          <p:cNvPr id="2026299149" name="Notes Placeholder 2"/>
           <p:cNvSpPr>
             <a:spLocks noGrp="1"/>
           </p:cNvSpPr>
@@ -3474,7 +3474,7 @@
       </p:sp>
       <p:sp>
         <p:nvSpPr>
-          <p:cNvPr id="4" name="Slide Number Placeholder 3"/>
+          <p:cNvPr id="377691575" name="Slide Number Placeholder 3"/>
           <p:cNvSpPr>
             <a:spLocks noGrp="1"/>
           </p:cNvSpPr>
@@ -3525,7 +3525,7 @@
       </p:grpSpPr>
       <p:sp>
         <p:nvSpPr>
-          <p:cNvPr id="2" name="Slide Image Placeholder 1"/>
+          <p:cNvPr id="812760081" name="Slide Image Placeholder 1"/>
           <p:cNvSpPr>
             <a:spLocks noChangeAspect="1" noGrp="1" noRot="1"/>
           </p:cNvSpPr>
@@ -3537,7 +3537,7 @@
       </p:sp>
       <p:sp>
         <p:nvSpPr>
-          <p:cNvPr id="3" name="Notes Placeholder 2"/>
+          <p:cNvPr id="1372016670" name="Notes Placeholder 2"/>
           <p:cNvSpPr>
             <a:spLocks noGrp="1"/>
           </p:cNvSpPr>
@@ -3559,7 +3559,7 @@
       </p:sp>
       <p:sp>
         <p:nvSpPr>
-          <p:cNvPr id="4" name="Slide Number Placeholder 3"/>
+          <p:cNvPr id="1598411078" name="Slide Number Placeholder 3"/>
           <p:cNvSpPr>
             <a:spLocks noGrp="1"/>
           </p:cNvSpPr>
@@ -3610,7 +3610,7 @@
       </p:grpSpPr>
       <p:sp>
         <p:nvSpPr>
-          <p:cNvPr id="2" name="Slide Image Placeholder 1"/>
+          <p:cNvPr id="548642477" name="Slide Image Placeholder 1"/>
           <p:cNvSpPr>
             <a:spLocks noChangeAspect="1" noGrp="1" noRot="1"/>
           </p:cNvSpPr>
@@ -3622,7 +3622,7 @@
       </p:sp>
       <p:sp>
         <p:nvSpPr>
-          <p:cNvPr id="3" name="Notes Placeholder 2"/>
+          <p:cNvPr id="2135222042" name="Notes Placeholder 2"/>
           <p:cNvSpPr>
             <a:spLocks noGrp="1"/>
           </p:cNvSpPr>
@@ -3644,7 +3644,7 @@
       </p:sp>
       <p:sp>
         <p:nvSpPr>
-          <p:cNvPr id="4" name="Slide Number Placeholder 3"/>
+          <p:cNvPr id="587633447" name="Slide Number Placeholder 3"/>
           <p:cNvSpPr>
             <a:spLocks noGrp="1"/>
           </p:cNvSpPr>
@@ -3695,7 +3695,7 @@
       </p:grpSpPr>
       <p:sp>
         <p:nvSpPr>
-          <p:cNvPr id="2" name="Slide Image Placeholder 1"/>
+          <p:cNvPr id="1143375742" name="Slide Image Placeholder 1"/>
           <p:cNvSpPr>
             <a:spLocks noChangeAspect="1" noGrp="1" noRot="1"/>
           </p:cNvSpPr>
@@ -3707,7 +3707,7 @@
       </p:sp>
       <p:sp>
         <p:nvSpPr>
-          <p:cNvPr id="3" name="Notes Placeholder 2"/>
+          <p:cNvPr id="2066936097" name="Notes Placeholder 2"/>
           <p:cNvSpPr>
             <a:spLocks noGrp="1"/>
           </p:cNvSpPr>
@@ -3729,7 +3729,7 @@
       </p:sp>
       <p:sp>
         <p:nvSpPr>
-          <p:cNvPr id="4" name="Slide Number Placeholder 3"/>
+          <p:cNvPr id="1645464360" name="Slide Number Placeholder 3"/>
           <p:cNvSpPr>
             <a:spLocks noGrp="1"/>
           </p:cNvSpPr>
@@ -3780,7 +3780,7 @@
       </p:grpSpPr>
       <p:sp>
         <p:nvSpPr>
-          <p:cNvPr id="1963198359" name="Slide Image Placeholder 1"/>
+          <p:cNvPr id="911662281" name="Slide Image Placeholder 1"/>
           <p:cNvSpPr>
             <a:spLocks noChangeAspect="1" noGrp="1" noRot="1"/>
           </p:cNvSpPr>
@@ -3792,7 +3792,7 @@
       </p:sp>
       <p:sp>
         <p:nvSpPr>
-          <p:cNvPr id="1614315134" name="Notes Placeholder 2"/>
+          <p:cNvPr id="1302308026" name="Notes Placeholder 2"/>
           <p:cNvSpPr>
             <a:spLocks noGrp="1"/>
           </p:cNvSpPr>
@@ -3825,7 +3825,7 @@
       </p:sp>
       <p:sp>
         <p:nvSpPr>
-          <p:cNvPr id="1637112441" name="Slide Number Placeholder 3"/>
+          <p:cNvPr id="1760596647" name="Slide Number Placeholder 3"/>
           <p:cNvSpPr>
             <a:spLocks noGrp="1"/>
           </p:cNvSpPr>
@@ -3876,7 +3876,7 @@
       </p:grpSpPr>
       <p:sp>
         <p:nvSpPr>
-          <p:cNvPr id="2" name="Slide Image Placeholder 1"/>
+          <p:cNvPr id="1490038836" name="Slide Image Placeholder 1"/>
           <p:cNvSpPr>
             <a:spLocks noChangeAspect="1" noGrp="1" noRot="1"/>
           </p:cNvSpPr>
@@ -3888,7 +3888,7 @@
       </p:sp>
       <p:sp>
         <p:nvSpPr>
-          <p:cNvPr id="3" name="Notes Placeholder 2"/>
+          <p:cNvPr id="458576998" name="Notes Placeholder 2"/>
           <p:cNvSpPr>
             <a:spLocks noGrp="1"/>
           </p:cNvSpPr>
@@ -3910,7 +3910,7 @@
       </p:sp>
       <p:sp>
         <p:nvSpPr>
-          <p:cNvPr id="4" name="Slide Number Placeholder 3"/>
+          <p:cNvPr id="1162014633" name="Slide Number Placeholder 3"/>
           <p:cNvSpPr>
             <a:spLocks noGrp="1"/>
           </p:cNvSpPr>
@@ -3961,7 +3961,7 @@
       </p:grpSpPr>
       <p:sp>
         <p:nvSpPr>
-          <p:cNvPr id="2" name="Slide Image Placeholder 1"/>
+          <p:cNvPr id="1221188720" name="Slide Image Placeholder 1"/>
           <p:cNvSpPr>
             <a:spLocks noChangeAspect="1" noGrp="1" noRot="1"/>
           </p:cNvSpPr>
@@ -3973,7 +3973,7 @@
       </p:sp>
       <p:sp>
         <p:nvSpPr>
-          <p:cNvPr id="3" name="Notes Placeholder 2"/>
+          <p:cNvPr id="611303832" name="Notes Placeholder 2"/>
           <p:cNvSpPr>
             <a:spLocks noGrp="1"/>
           </p:cNvSpPr>
@@ -3995,7 +3995,7 @@
       </p:sp>
       <p:sp>
         <p:nvSpPr>
-          <p:cNvPr id="4" name="Slide Number Placeholder 3"/>
+          <p:cNvPr id="232250899" name="Slide Number Placeholder 3"/>
           <p:cNvSpPr>
             <a:spLocks noGrp="1"/>
           </p:cNvSpPr>
@@ -4046,7 +4046,7 @@
       </p:grpSpPr>
       <p:sp>
         <p:nvSpPr>
-          <p:cNvPr id="2" name="Slide Image Placeholder 1"/>
+          <p:cNvPr id="1954696894" name="Slide Image Placeholder 1"/>
           <p:cNvSpPr>
             <a:spLocks noChangeAspect="1" noGrp="1" noRot="1"/>
           </p:cNvSpPr>
@@ -4058,7 +4058,7 @@
       </p:sp>
       <p:sp>
         <p:nvSpPr>
-          <p:cNvPr id="3" name="Notes Placeholder 2"/>
+          <p:cNvPr id="2104222404" name="Notes Placeholder 2"/>
           <p:cNvSpPr>
             <a:spLocks noGrp="1"/>
           </p:cNvSpPr>
@@ -4080,7 +4080,7 @@
       </p:sp>
       <p:sp>
         <p:nvSpPr>
-          <p:cNvPr id="4" name="Slide Number Placeholder 3"/>
+          <p:cNvPr id="950474069" name="Slide Number Placeholder 3"/>
           <p:cNvSpPr>
             <a:spLocks noGrp="1"/>
           </p:cNvSpPr>
@@ -4131,7 +4131,7 @@
       </p:grpSpPr>
       <p:sp>
         <p:nvSpPr>
-          <p:cNvPr id="2" name="Slide Image Placeholder 1"/>
+          <p:cNvPr id="873649237" name="Slide Image Placeholder 1"/>
           <p:cNvSpPr>
             <a:spLocks noChangeAspect="1" noGrp="1" noRot="1"/>
           </p:cNvSpPr>
@@ -4143,7 +4143,7 @@
       </p:sp>
       <p:sp>
         <p:nvSpPr>
-          <p:cNvPr id="3" name="Notes Placeholder 2"/>
+          <p:cNvPr id="558501586" name="Notes Placeholder 2"/>
           <p:cNvSpPr>
             <a:spLocks noGrp="1"/>
           </p:cNvSpPr>
@@ -4165,7 +4165,7 @@
       </p:sp>
       <p:sp>
         <p:nvSpPr>
-          <p:cNvPr id="4" name="Slide Number Placeholder 3"/>
+          <p:cNvPr id="1503533139" name="Slide Number Placeholder 3"/>
           <p:cNvSpPr>
             <a:spLocks noGrp="1"/>
           </p:cNvSpPr>
@@ -4216,7 +4216,7 @@
       </p:grpSpPr>
       <p:sp>
         <p:nvSpPr>
-          <p:cNvPr id="1232007629" name="Slide Image Placeholder 1"/>
+          <p:cNvPr id="2005734833" name="Slide Image Placeholder 1"/>
           <p:cNvSpPr>
             <a:spLocks noChangeAspect="1" noGrp="1" noRot="1"/>
           </p:cNvSpPr>
@@ -4228,7 +4228,7 @@
       </p:sp>
       <p:sp>
         <p:nvSpPr>
-          <p:cNvPr id="68590600" name="Notes Placeholder 2"/>
+          <p:cNvPr id="185323659" name="Notes Placeholder 2"/>
           <p:cNvSpPr>
             <a:spLocks noGrp="1"/>
           </p:cNvSpPr>
@@ -4250,7 +4250,7 @@
       </p:sp>
       <p:sp>
         <p:nvSpPr>
-          <p:cNvPr id="1166907875" name="Slide Number Placeholder 3"/>
+          <p:cNvPr id="922892586" name="Slide Number Placeholder 3"/>
           <p:cNvSpPr>
             <a:spLocks noGrp="1"/>
           </p:cNvSpPr>
@@ -4301,7 +4301,7 @@
       </p:grpSpPr>
       <p:sp>
         <p:nvSpPr>
-          <p:cNvPr id="2" name="Slide Image Placeholder 1"/>
+          <p:cNvPr id="1909800894" name="Slide Image Placeholder 1"/>
           <p:cNvSpPr>
             <a:spLocks noChangeAspect="1" noGrp="1" noRot="1"/>
           </p:cNvSpPr>
@@ -4313,7 +4313,7 @@
       </p:sp>
       <p:sp>
         <p:nvSpPr>
-          <p:cNvPr id="3" name="Notes Placeholder 2"/>
+          <p:cNvPr id="347503257" name="Notes Placeholder 2"/>
           <p:cNvSpPr>
             <a:spLocks noGrp="1"/>
           </p:cNvSpPr>
@@ -4335,7 +4335,7 @@
       </p:sp>
       <p:sp>
         <p:nvSpPr>
-          <p:cNvPr id="4" name="Slide Number Placeholder 3"/>
+          <p:cNvPr id="1547758681" name="Slide Number Placeholder 3"/>
           <p:cNvSpPr>
             <a:spLocks noGrp="1"/>
           </p:cNvSpPr>
@@ -4386,7 +4386,7 @@
       </p:grpSpPr>
       <p:sp>
         <p:nvSpPr>
-          <p:cNvPr id="2" name="Slide Image Placeholder 1"/>
+          <p:cNvPr id="217285377" name="Slide Image Placeholder 1"/>
           <p:cNvSpPr>
             <a:spLocks noChangeAspect="1" noGrp="1" noRot="1"/>
           </p:cNvSpPr>
@@ -4398,7 +4398,7 @@
       </p:sp>
       <p:sp>
         <p:nvSpPr>
-          <p:cNvPr id="3" name="Notes Placeholder 2"/>
+          <p:cNvPr id="1027742810" name="Notes Placeholder 2"/>
           <p:cNvSpPr>
             <a:spLocks noGrp="1"/>
           </p:cNvSpPr>
@@ -4420,7 +4420,7 @@
       </p:sp>
       <p:sp>
         <p:nvSpPr>
-          <p:cNvPr id="4" name="Slide Number Placeholder 3"/>
+          <p:cNvPr id="1905592937" name="Slide Number Placeholder 3"/>
           <p:cNvSpPr>
             <a:spLocks noGrp="1"/>
           </p:cNvSpPr>
@@ -4471,7 +4471,7 @@
       </p:grpSpPr>
       <p:sp>
         <p:nvSpPr>
-          <p:cNvPr id="754029178" name="Slide Image Placeholder 1"/>
+          <p:cNvPr id="952452722" name="Slide Image Placeholder 1"/>
           <p:cNvSpPr>
             <a:spLocks noChangeAspect="1" noGrp="1" noRot="1"/>
           </p:cNvSpPr>
@@ -4483,7 +4483,7 @@
       </p:sp>
       <p:sp>
         <p:nvSpPr>
-          <p:cNvPr id="1341911376" name="Notes Placeholder 2"/>
+          <p:cNvPr id="449646297" name="Notes Placeholder 2"/>
           <p:cNvSpPr>
             <a:spLocks noGrp="1"/>
           </p:cNvSpPr>
@@ -4505,7 +4505,7 @@
       </p:sp>
       <p:sp>
         <p:nvSpPr>
-          <p:cNvPr id="151967271" name="Slide Number Placeholder 3"/>
+          <p:cNvPr id="594794159" name="Slide Number Placeholder 3"/>
           <p:cNvSpPr>
             <a:spLocks noGrp="1"/>
           </p:cNvSpPr>
@@ -4556,7 +4556,7 @@
       </p:grpSpPr>
       <p:sp>
         <p:nvSpPr>
-          <p:cNvPr id="2" name="Slide Image Placeholder 1"/>
+          <p:cNvPr id="1222345215" name="Slide Image Placeholder 1"/>
           <p:cNvSpPr>
             <a:spLocks noChangeAspect="1" noGrp="1" noRot="1"/>
           </p:cNvSpPr>
@@ -4568,7 +4568,7 @@
       </p:sp>
       <p:sp>
         <p:nvSpPr>
-          <p:cNvPr id="3" name="Notes Placeholder 2"/>
+          <p:cNvPr id="465191635" name="Notes Placeholder 2"/>
           <p:cNvSpPr>
             <a:spLocks noGrp="1"/>
           </p:cNvSpPr>
@@ -4590,7 +4590,7 @@
       </p:sp>
       <p:sp>
         <p:nvSpPr>
-          <p:cNvPr id="4" name="Slide Number Placeholder 3"/>
+          <p:cNvPr id="536995758" name="Slide Number Placeholder 3"/>
           <p:cNvSpPr>
             <a:spLocks noGrp="1"/>
           </p:cNvSpPr>
@@ -4650,7 +4650,7 @@
       </p:grpSpPr>
       <p:sp>
         <p:nvSpPr>
-          <p:cNvPr id="67919710" name="Title 1"/>
+          <p:cNvPr id="273116604" name="Title 1"/>
           <p:cNvSpPr>
             <a:spLocks noGrp="1"/>
           </p:cNvSpPr>
@@ -4694,7 +4694,7 @@
       </p:sp>
       <p:sp>
         <p:nvSpPr>
-          <p:cNvPr id="369888763" name="Subtitle 2"/>
+          <p:cNvPr id="580413570" name="Subtitle 2"/>
           <p:cNvSpPr>
             <a:spLocks noGrp="1"/>
           </p:cNvSpPr>
@@ -4770,7 +4770,7 @@
       </p:sp>
       <p:sp>
         <p:nvSpPr>
-          <p:cNvPr id="1539179743" name="Rectangle 6"/>
+          <p:cNvPr id="769098122" name="Rectangle 6"/>
           <p:cNvSpPr/>
           <p:nvPr/>
         </p:nvSpPr>
@@ -4808,7 +4808,7 @@
       </p:sp>
       <p:sp>
         <p:nvSpPr>
-          <p:cNvPr id="1310864620" name="Date Placeholder 7"/>
+          <p:cNvPr id="31388348" name="Date Placeholder 7"/>
           <p:cNvSpPr>
             <a:spLocks noGrp="1"/>
           </p:cNvSpPr>
@@ -4845,7 +4845,7 @@
       </p:sp>
       <p:sp>
         <p:nvSpPr>
-          <p:cNvPr id="1560784233" name="Footer Placeholder 8"/>
+          <p:cNvPr id="2127445859" name="Footer Placeholder 8"/>
           <p:cNvSpPr>
             <a:spLocks noGrp="1"/>
           </p:cNvSpPr>
@@ -4878,7 +4878,7 @@
       </p:sp>
       <p:sp>
         <p:nvSpPr>
-          <p:cNvPr id="1096441197" name="Slide Number Placeholder 9"/>
+          <p:cNvPr id="37058372" name="Slide Number Placeholder 9"/>
           <p:cNvSpPr>
             <a:spLocks noGrp="1"/>
           </p:cNvSpPr>
@@ -4940,7 +4940,7 @@
       </p:grpSpPr>
       <p:sp>
         <p:nvSpPr>
-          <p:cNvPr id="1646489031" name="Title 1"/>
+          <p:cNvPr id="234476249" name="Title 1"/>
           <p:cNvSpPr>
             <a:spLocks noGrp="1"/>
           </p:cNvSpPr>
@@ -4966,7 +4966,7 @@
       </p:sp>
       <p:sp>
         <p:nvSpPr>
-          <p:cNvPr id="1220265502" name="Vertical Text Placeholder 2"/>
+          <p:cNvPr id="1043990770" name="Vertical Text Placeholder 2"/>
           <p:cNvSpPr>
             <a:spLocks noGrp="1"/>
           </p:cNvSpPr>
@@ -5032,7 +5032,7 @@
       </p:sp>
       <p:sp>
         <p:nvSpPr>
-          <p:cNvPr id="884126184" name="Date Placeholder 3"/>
+          <p:cNvPr id="1602681654" name="Date Placeholder 3"/>
           <p:cNvSpPr>
             <a:spLocks noGrp="1"/>
           </p:cNvSpPr>
@@ -5058,7 +5058,7 @@
       </p:sp>
       <p:sp>
         <p:nvSpPr>
-          <p:cNvPr id="1135381922" name="Footer Placeholder 4"/>
+          <p:cNvPr id="1680404321" name="Footer Placeholder 4"/>
           <p:cNvSpPr>
             <a:spLocks noGrp="1"/>
           </p:cNvSpPr>
@@ -5080,7 +5080,7 @@
       </p:sp>
       <p:sp>
         <p:nvSpPr>
-          <p:cNvPr id="1951929113" name="Slide Number Placeholder 5"/>
+          <p:cNvPr id="735107217" name="Slide Number Placeholder 5"/>
           <p:cNvSpPr>
             <a:spLocks noGrp="1"/>
           </p:cNvSpPr>
@@ -5131,7 +5131,7 @@
       </p:grpSpPr>
       <p:sp>
         <p:nvSpPr>
-          <p:cNvPr id="1341053140" name="Vertical Title 1"/>
+          <p:cNvPr id="400656416" name="Vertical Title 1"/>
           <p:cNvSpPr>
             <a:spLocks noGrp="1"/>
           </p:cNvSpPr>
@@ -5162,7 +5162,7 @@
       </p:sp>
       <p:sp>
         <p:nvSpPr>
-          <p:cNvPr id="1038359241" name="Vertical Text Placeholder 2"/>
+          <p:cNvPr id="204817885" name="Vertical Text Placeholder 2"/>
           <p:cNvSpPr>
             <a:spLocks noGrp="1"/>
           </p:cNvSpPr>
@@ -5233,7 +5233,7 @@
       </p:sp>
       <p:sp>
         <p:nvSpPr>
-          <p:cNvPr id="1395198068" name="Date Placeholder 3"/>
+          <p:cNvPr id="1608615905" name="Date Placeholder 3"/>
           <p:cNvSpPr>
             <a:spLocks noGrp="1"/>
           </p:cNvSpPr>
@@ -5259,7 +5259,7 @@
       </p:sp>
       <p:sp>
         <p:nvSpPr>
-          <p:cNvPr id="2099947605" name="Footer Placeholder 4"/>
+          <p:cNvPr id="2005985717" name="Footer Placeholder 4"/>
           <p:cNvSpPr>
             <a:spLocks noGrp="1"/>
           </p:cNvSpPr>
@@ -5281,7 +5281,7 @@
       </p:sp>
       <p:sp>
         <p:nvSpPr>
-          <p:cNvPr id="1467007156" name="Slide Number Placeholder 5"/>
+          <p:cNvPr id="1022154157" name="Slide Number Placeholder 5"/>
           <p:cNvSpPr>
             <a:spLocks noGrp="1"/>
           </p:cNvSpPr>
@@ -5332,7 +5332,7 @@
       </p:grpSpPr>
       <p:sp>
         <p:nvSpPr>
-          <p:cNvPr id="1537069304" name="Title 1"/>
+          <p:cNvPr id="1586421273" name="Title 1"/>
           <p:cNvSpPr>
             <a:spLocks noGrp="1"/>
           </p:cNvSpPr>
@@ -5358,7 +5358,7 @@
       </p:sp>
       <p:sp>
         <p:nvSpPr>
-          <p:cNvPr id="245027000" name="Content Placeholder 2"/>
+          <p:cNvPr id="850892327" name="Content Placeholder 2"/>
           <p:cNvSpPr>
             <a:spLocks noGrp="1"/>
           </p:cNvSpPr>
@@ -5424,7 +5424,7 @@
       </p:sp>
       <p:sp>
         <p:nvSpPr>
-          <p:cNvPr id="1938717874" name="Date Placeholder 3"/>
+          <p:cNvPr id="231626648" name="Date Placeholder 3"/>
           <p:cNvSpPr>
             <a:spLocks noGrp="1"/>
           </p:cNvSpPr>
@@ -5450,7 +5450,7 @@
       </p:sp>
       <p:sp>
         <p:nvSpPr>
-          <p:cNvPr id="552342580" name="Footer Placeholder 4"/>
+          <p:cNvPr id="97010375" name="Footer Placeholder 4"/>
           <p:cNvSpPr>
             <a:spLocks noGrp="1"/>
           </p:cNvSpPr>
@@ -5472,7 +5472,7 @@
       </p:sp>
       <p:sp>
         <p:nvSpPr>
-          <p:cNvPr id="1547299002" name="Slide Number Placeholder 5"/>
+          <p:cNvPr id="1474897648" name="Slide Number Placeholder 5"/>
           <p:cNvSpPr>
             <a:spLocks noGrp="1"/>
           </p:cNvSpPr>
@@ -5523,7 +5523,7 @@
       </p:grpSpPr>
       <p:sp>
         <p:nvSpPr>
-          <p:cNvPr id="1115235893" name="Title 1"/>
+          <p:cNvPr id="426094224" name="Title 1"/>
           <p:cNvSpPr>
             <a:spLocks noGrp="1"/>
           </p:cNvSpPr>
@@ -5563,7 +5563,7 @@
       </p:sp>
       <p:sp>
         <p:nvSpPr>
-          <p:cNvPr id="978084950" name="Text Placeholder 2"/>
+          <p:cNvPr id="1947685407" name="Text Placeholder 2"/>
           <p:cNvSpPr>
             <a:spLocks noGrp="1"/>
           </p:cNvSpPr>
@@ -5688,7 +5688,7 @@
       </p:sp>
       <p:sp>
         <p:nvSpPr>
-          <p:cNvPr id="1636909333" name="Date Placeholder 3"/>
+          <p:cNvPr id="1408240162" name="Date Placeholder 3"/>
           <p:cNvSpPr>
             <a:spLocks noGrp="1"/>
           </p:cNvSpPr>
@@ -5714,7 +5714,7 @@
       </p:sp>
       <p:sp>
         <p:nvSpPr>
-          <p:cNvPr id="1325940536" name="Footer Placeholder 4"/>
+          <p:cNvPr id="2127831733" name="Footer Placeholder 4"/>
           <p:cNvSpPr>
             <a:spLocks noGrp="1"/>
           </p:cNvSpPr>
@@ -5736,7 +5736,7 @@
       </p:sp>
       <p:sp>
         <p:nvSpPr>
-          <p:cNvPr id="1882404412" name="Slide Number Placeholder 5"/>
+          <p:cNvPr id="1454088506" name="Slide Number Placeholder 5"/>
           <p:cNvSpPr>
             <a:spLocks noGrp="1"/>
           </p:cNvSpPr>
@@ -5762,7 +5762,7 @@
       </p:sp>
       <p:sp>
         <p:nvSpPr>
-          <p:cNvPr id="51375319" name="Rectangle 6"/>
+          <p:cNvPr id="1158517011" name="Rectangle 6"/>
           <p:cNvSpPr/>
           <p:nvPr/>
         </p:nvSpPr>
@@ -5825,7 +5825,7 @@
       </p:grpSpPr>
       <p:sp>
         <p:nvSpPr>
-          <p:cNvPr id="1104098735" name="Title 1"/>
+          <p:cNvPr id="1799638404" name="Title 1"/>
           <p:cNvSpPr>
             <a:spLocks noGrp="1"/>
           </p:cNvSpPr>
@@ -5851,7 +5851,7 @@
       </p:sp>
       <p:sp>
         <p:nvSpPr>
-          <p:cNvPr id="620589879" name="Content Placeholder 2"/>
+          <p:cNvPr id="1621529382" name="Content Placeholder 2"/>
           <p:cNvSpPr>
             <a:spLocks noGrp="1"/>
           </p:cNvSpPr>
@@ -5950,7 +5950,7 @@
       </p:sp>
       <p:sp>
         <p:nvSpPr>
-          <p:cNvPr id="994071854" name="Content Placeholder 3"/>
+          <p:cNvPr id="1175333131" name="Content Placeholder 3"/>
           <p:cNvSpPr>
             <a:spLocks noGrp="1"/>
           </p:cNvSpPr>
@@ -6049,7 +6049,7 @@
       </p:sp>
       <p:sp>
         <p:nvSpPr>
-          <p:cNvPr id="1856710672" name="Date Placeholder 4"/>
+          <p:cNvPr id="1894395648" name="Date Placeholder 4"/>
           <p:cNvSpPr>
             <a:spLocks noGrp="1"/>
           </p:cNvSpPr>
@@ -6075,7 +6075,7 @@
       </p:sp>
       <p:sp>
         <p:nvSpPr>
-          <p:cNvPr id="1936220799" name="Footer Placeholder 5"/>
+          <p:cNvPr id="680264098" name="Footer Placeholder 5"/>
           <p:cNvSpPr>
             <a:spLocks noGrp="1"/>
           </p:cNvSpPr>
@@ -6097,7 +6097,7 @@
       </p:sp>
       <p:sp>
         <p:nvSpPr>
-          <p:cNvPr id="601318213" name="Slide Number Placeholder 6"/>
+          <p:cNvPr id="1725605080" name="Slide Number Placeholder 6"/>
           <p:cNvSpPr>
             <a:spLocks noGrp="1"/>
           </p:cNvSpPr>
@@ -6148,7 +6148,7 @@
       </p:grpSpPr>
       <p:sp>
         <p:nvSpPr>
-          <p:cNvPr id="974148773" name="Title 9"/>
+          <p:cNvPr id="616709042" name="Title 9"/>
           <p:cNvSpPr>
             <a:spLocks noGrp="1"/>
           </p:cNvSpPr>
@@ -6174,7 +6174,7 @@
       </p:sp>
       <p:sp>
         <p:nvSpPr>
-          <p:cNvPr id="21654339" name="Text Placeholder 2"/>
+          <p:cNvPr id="1497491482" name="Text Placeholder 2"/>
           <p:cNvSpPr>
             <a:spLocks noGrp="1"/>
           </p:cNvSpPr>
@@ -6251,7 +6251,7 @@
       </p:sp>
       <p:sp>
         <p:nvSpPr>
-          <p:cNvPr id="2051946683" name="Content Placeholder 3"/>
+          <p:cNvPr id="1845090883" name="Content Placeholder 3"/>
           <p:cNvSpPr>
             <a:spLocks noGrp="1"/>
           </p:cNvSpPr>
@@ -6350,7 +6350,7 @@
       </p:sp>
       <p:sp>
         <p:nvSpPr>
-          <p:cNvPr id="1064350457" name="Text Placeholder 10"/>
+          <p:cNvPr id="1890616544" name="Text Placeholder 10"/>
           <p:cNvSpPr>
             <a:spLocks noGrp="1"/>
           </p:cNvSpPr>
@@ -6410,7 +6410,7 @@
       </p:sp>
       <p:sp>
         <p:nvSpPr>
-          <p:cNvPr id="1046579936" name="Content Placeholder 5"/>
+          <p:cNvPr id="435100763" name="Content Placeholder 5"/>
           <p:cNvSpPr>
             <a:spLocks noGrp="1"/>
           </p:cNvSpPr>
@@ -6509,7 +6509,7 @@
       </p:sp>
       <p:sp>
         <p:nvSpPr>
-          <p:cNvPr id="1068653714" name="Date Placeholder 6"/>
+          <p:cNvPr id="466691932" name="Date Placeholder 6"/>
           <p:cNvSpPr>
             <a:spLocks noGrp="1"/>
           </p:cNvSpPr>
@@ -6535,7 +6535,7 @@
       </p:sp>
       <p:sp>
         <p:nvSpPr>
-          <p:cNvPr id="1513359941" name="Footer Placeholder 7"/>
+          <p:cNvPr id="1355877531" name="Footer Placeholder 7"/>
           <p:cNvSpPr>
             <a:spLocks noGrp="1"/>
           </p:cNvSpPr>
@@ -6557,7 +6557,7 @@
       </p:sp>
       <p:sp>
         <p:nvSpPr>
-          <p:cNvPr id="1195515459" name="Slide Number Placeholder 8"/>
+          <p:cNvPr id="467931785" name="Slide Number Placeholder 8"/>
           <p:cNvSpPr>
             <a:spLocks noGrp="1"/>
           </p:cNvSpPr>
@@ -6608,7 +6608,7 @@
       </p:grpSpPr>
       <p:sp>
         <p:nvSpPr>
-          <p:cNvPr id="762685926" name="Title 5"/>
+          <p:cNvPr id="252878591" name="Title 5"/>
           <p:cNvSpPr>
             <a:spLocks noGrp="1"/>
           </p:cNvSpPr>
@@ -6634,7 +6634,7 @@
       </p:sp>
       <p:sp>
         <p:nvSpPr>
-          <p:cNvPr id="1742612773" name="Date Placeholder 2"/>
+          <p:cNvPr id="395643713" name="Date Placeholder 2"/>
           <p:cNvSpPr>
             <a:spLocks noGrp="1"/>
           </p:cNvSpPr>
@@ -6660,7 +6660,7 @@
       </p:sp>
       <p:sp>
         <p:nvSpPr>
-          <p:cNvPr id="864922702" name="Footer Placeholder 3"/>
+          <p:cNvPr id="569154759" name="Footer Placeholder 3"/>
           <p:cNvSpPr>
             <a:spLocks noGrp="1"/>
           </p:cNvSpPr>
@@ -6682,7 +6682,7 @@
       </p:sp>
       <p:sp>
         <p:nvSpPr>
-          <p:cNvPr id="378508605" name="Slide Number Placeholder 4"/>
+          <p:cNvPr id="186871665" name="Slide Number Placeholder 4"/>
           <p:cNvSpPr>
             <a:spLocks noGrp="1"/>
           </p:cNvSpPr>
@@ -6733,7 +6733,7 @@
       </p:grpSpPr>
       <p:sp>
         <p:nvSpPr>
-          <p:cNvPr id="891522942" name="Date Placeholder 1"/>
+          <p:cNvPr id="1487226674" name="Date Placeholder 1"/>
           <p:cNvSpPr>
             <a:spLocks noGrp="1"/>
           </p:cNvSpPr>
@@ -6759,7 +6759,7 @@
       </p:sp>
       <p:sp>
         <p:nvSpPr>
-          <p:cNvPr id="1405721818" name="Footer Placeholder 2"/>
+          <p:cNvPr id="116921114" name="Footer Placeholder 2"/>
           <p:cNvSpPr>
             <a:spLocks noGrp="1"/>
           </p:cNvSpPr>
@@ -6781,7 +6781,7 @@
       </p:sp>
       <p:sp>
         <p:nvSpPr>
-          <p:cNvPr id="16518319" name="Slide Number Placeholder 3"/>
+          <p:cNvPr id="1427322766" name="Slide Number Placeholder 3"/>
           <p:cNvSpPr>
             <a:spLocks noGrp="1"/>
           </p:cNvSpPr>
@@ -6832,7 +6832,7 @@
       </p:grpSpPr>
       <p:sp>
         <p:nvSpPr>
-          <p:cNvPr id="1419222880" name="Title 1"/>
+          <p:cNvPr id="2090192841" name="Title 1"/>
           <p:cNvSpPr>
             <a:spLocks noGrp="1"/>
           </p:cNvSpPr>
@@ -6869,7 +6869,7 @@
       </p:sp>
       <p:sp>
         <p:nvSpPr>
-          <p:cNvPr id="1362969084" name="Content Placeholder 2"/>
+          <p:cNvPr id="69005277" name="Content Placeholder 2"/>
           <p:cNvSpPr>
             <a:spLocks noGrp="1"/>
           </p:cNvSpPr>
@@ -6968,7 +6968,7 @@
       </p:sp>
       <p:sp>
         <p:nvSpPr>
-          <p:cNvPr id="1609005662" name="Text Placeholder 3"/>
+          <p:cNvPr id="1184529383" name="Text Placeholder 3"/>
           <p:cNvSpPr>
             <a:spLocks noGrp="1"/>
           </p:cNvSpPr>
@@ -7044,7 +7044,7 @@
       </p:sp>
       <p:sp>
         <p:nvSpPr>
-          <p:cNvPr id="585614313" name="Date Placeholder 4"/>
+          <p:cNvPr id="1541403341" name="Date Placeholder 4"/>
           <p:cNvSpPr>
             <a:spLocks noGrp="1"/>
           </p:cNvSpPr>
@@ -7070,7 +7070,7 @@
       </p:sp>
       <p:sp>
         <p:nvSpPr>
-          <p:cNvPr id="1457167342" name="Footer Placeholder 5"/>
+          <p:cNvPr id="266811316" name="Footer Placeholder 5"/>
           <p:cNvSpPr>
             <a:spLocks noGrp="1"/>
           </p:cNvSpPr>
@@ -7092,7 +7092,7 @@
       </p:sp>
       <p:sp>
         <p:nvSpPr>
-          <p:cNvPr id="478346988" name="Slide Number Placeholder 6"/>
+          <p:cNvPr id="373340449" name="Slide Number Placeholder 6"/>
           <p:cNvSpPr>
             <a:spLocks noGrp="1"/>
           </p:cNvSpPr>
@@ -7143,7 +7143,7 @@
       </p:grpSpPr>
       <p:sp>
         <p:nvSpPr>
-          <p:cNvPr id="1695968018" name="Rectangle 7"/>
+          <p:cNvPr id="379805036" name="Rectangle 7"/>
           <p:cNvSpPr/>
           <p:nvPr/>
         </p:nvSpPr>
@@ -7181,7 +7181,7 @@
       </p:sp>
       <p:sp>
         <p:nvSpPr>
-          <p:cNvPr id="1003934513" name="Title 1"/>
+          <p:cNvPr id="1327626173" name="Title 1"/>
           <p:cNvSpPr>
             <a:spLocks noGrp="1"/>
           </p:cNvSpPr>
@@ -7222,7 +7222,7 @@
       </p:sp>
       <p:sp>
         <p:nvSpPr>
-          <p:cNvPr id="366459296" name="Picture Placeholder 2"/>
+          <p:cNvPr id="1810048866" name="Picture Placeholder 2"/>
           <p:cNvSpPr>
             <a:spLocks noChangeAspect="1" noGrp="1"/>
           </p:cNvSpPr>
@@ -7300,7 +7300,7 @@
       </p:sp>
       <p:sp>
         <p:nvSpPr>
-          <p:cNvPr id="1495357375" name="Text Placeholder 3"/>
+          <p:cNvPr id="65661331" name="Text Placeholder 3"/>
           <p:cNvSpPr>
             <a:spLocks noGrp="1"/>
           </p:cNvSpPr>
@@ -7382,7 +7382,7 @@
       </p:sp>
       <p:sp>
         <p:nvSpPr>
-          <p:cNvPr id="502480635" name="Date Placeholder 4"/>
+          <p:cNvPr id="766523880" name="Date Placeholder 4"/>
           <p:cNvSpPr>
             <a:spLocks noGrp="1"/>
           </p:cNvSpPr>
@@ -7408,7 +7408,7 @@
       </p:sp>
       <p:sp>
         <p:nvSpPr>
-          <p:cNvPr id="135231890" name="Footer Placeholder 5"/>
+          <p:cNvPr id="1713664360" name="Footer Placeholder 5"/>
           <p:cNvSpPr>
             <a:spLocks noGrp="1"/>
           </p:cNvSpPr>
@@ -7430,7 +7430,7 @@
       </p:sp>
       <p:sp>
         <p:nvSpPr>
-          <p:cNvPr id="810592218" name="Slide Number Placeholder 6"/>
+          <p:cNvPr id="1326353474" name="Slide Number Placeholder 6"/>
           <p:cNvSpPr>
             <a:spLocks noGrp="1"/>
           </p:cNvSpPr>
@@ -7486,7 +7486,7 @@
       </p:grpSpPr>
       <p:sp>
         <p:nvSpPr>
-          <p:cNvPr id="1407849673" name="Rectangle 6"/>
+          <p:cNvPr id="241721926" name="Rectangle 6"/>
           <p:cNvSpPr/>
           <p:nvPr/>
         </p:nvSpPr>
@@ -7526,7 +7526,7 @@
       </p:sp>
       <p:sp>
         <p:nvSpPr>
-          <p:cNvPr id="690514205" name="Title Placeholder 1"/>
+          <p:cNvPr id="1292274077" name="Title Placeholder 1"/>
           <p:cNvSpPr>
             <a:spLocks noGrp="1"/>
           </p:cNvSpPr>
@@ -7562,7 +7562,7 @@
       </p:sp>
       <p:sp>
         <p:nvSpPr>
-          <p:cNvPr id="1806045025" name="Text Placeholder 2"/>
+          <p:cNvPr id="1180734706" name="Text Placeholder 2"/>
           <p:cNvSpPr>
             <a:spLocks noGrp="1"/>
           </p:cNvSpPr>
@@ -7638,7 +7638,7 @@
       </p:sp>
       <p:sp>
         <p:nvSpPr>
-          <p:cNvPr id="1887986082" name="Date Placeholder 3"/>
+          <p:cNvPr id="82310695" name="Date Placeholder 3"/>
           <p:cNvSpPr>
             <a:spLocks noGrp="1"/>
           </p:cNvSpPr>
@@ -7647,7 +7647,7 @@
           </p:nvPr>
         </p:nvSpPr>
         <p:spPr bwMode="auto">
-          <a:xfrm rot="16199999">
+          <a:xfrm rot="16199998">
             <a:off x="7831456" y="1044178"/>
             <a:ext cx="1904999" cy="273844"/>
           </a:xfrm>
@@ -7683,7 +7683,7 @@
       </p:sp>
       <p:sp>
         <p:nvSpPr>
-          <p:cNvPr id="1289796680" name="Footer Placeholder 4"/>
+          <p:cNvPr id="454995525" name="Footer Placeholder 4"/>
           <p:cNvSpPr>
             <a:spLocks noGrp="1"/>
           </p:cNvSpPr>
@@ -7692,7 +7692,7 @@
           </p:nvPr>
         </p:nvSpPr>
         <p:spPr bwMode="auto">
-          <a:xfrm rot="16199999">
+          <a:xfrm rot="16199998">
             <a:off x="6993255" y="4092178"/>
             <a:ext cx="3581400" cy="273844"/>
           </a:xfrm>
@@ -7724,7 +7724,7 @@
       </p:sp>
       <p:sp>
         <p:nvSpPr>
-          <p:cNvPr id="1431968108" name="Slide Number Placeholder 5"/>
+          <p:cNvPr id="2071059526" name="Slide Number Placeholder 5"/>
           <p:cNvSpPr>
             <a:spLocks noGrp="1"/>
           </p:cNvSpPr>
@@ -8166,7 +8166,7 @@
       </p:grpSpPr>
       <p:sp>
         <p:nvSpPr>
-          <p:cNvPr id="1404590163" name="Title 3"/>
+          <p:cNvPr id="2145875527" name="Title 3"/>
           <p:cNvSpPr>
             <a:spLocks noGrp="1"/>
           </p:cNvSpPr>
@@ -8188,7 +8188,7 @@
       </p:sp>
       <p:sp>
         <p:nvSpPr>
-          <p:cNvPr id="479241254" name="Subtitle 2"/>
+          <p:cNvPr id="2008215370" name="Subtitle 2"/>
           <p:cNvSpPr>
             <a:spLocks noGrp="1"/>
           </p:cNvSpPr>
@@ -8315,7 +8315,7 @@
       </p:sp>
       <p:pic>
         <p:nvPicPr>
-          <p:cNvPr id="202140078" name="Picture 4" descr="Related image"/>
+          <p:cNvPr id="536971973" name="Picture 4" descr="Related image"/>
           <p:cNvPicPr>
             <a:picLocks noChangeAspect="1" noChangeArrowheads="1"/>
           </p:cNvPicPr>
@@ -8371,7 +8371,7 @@
       </p:grpSpPr>
       <p:sp>
         <p:nvSpPr>
-          <p:cNvPr id="810703752" name="Title 1"/>
+          <p:cNvPr id="1002689604" name="Title 1"/>
           <p:cNvSpPr>
             <a:spLocks noGrp="1"/>
           </p:cNvSpPr>
@@ -8411,7 +8411,7 @@
       </p:sp>
       <p:sp>
         <p:nvSpPr>
-          <p:cNvPr id="598339507" name="Content Placeholder 2"/>
+          <p:cNvPr id="953803228" name="Content Placeholder 2"/>
           <p:cNvSpPr>
             <a:spLocks noGrp="1"/>
           </p:cNvSpPr>
@@ -8509,7 +8509,7 @@
       </p:grpSpPr>
       <p:sp>
         <p:nvSpPr>
-          <p:cNvPr id="712917046" name="Title 1"/>
+          <p:cNvPr id="141812741" name="Title 1"/>
           <p:cNvSpPr>
             <a:spLocks noGrp="1"/>
           </p:cNvSpPr>
@@ -8540,7 +8540,7 @@
       </p:sp>
       <p:sp>
         <p:nvSpPr>
-          <p:cNvPr id="1529164178" name="Subtitle 2"/>
+          <p:cNvPr id="2131266103" name="Subtitle 2"/>
           <p:cNvSpPr>
             <a:spLocks noGrp="1"/>
           </p:cNvSpPr>
@@ -8697,7 +8697,7 @@
       </p:grpSpPr>
       <p:sp>
         <p:nvSpPr>
-          <p:cNvPr id="2056564337" name="Title 1"/>
+          <p:cNvPr id="353231854" name="Title 1"/>
           <p:cNvSpPr>
             <a:spLocks noGrp="1"/>
           </p:cNvSpPr>
@@ -8728,7 +8728,7 @@
       </p:sp>
       <p:sp>
         <p:nvSpPr>
-          <p:cNvPr id="132759755" name="Subtitle 2"/>
+          <p:cNvPr id="1961791843" name="Subtitle 2"/>
           <p:cNvSpPr>
             <a:spLocks noGrp="1"/>
           </p:cNvSpPr>
@@ -8887,7 +8887,7 @@
       </p:grpSpPr>
       <p:sp>
         <p:nvSpPr>
-          <p:cNvPr id="304932002" name="Title 1"/>
+          <p:cNvPr id="1963526757" name="Title 1"/>
           <p:cNvSpPr>
             <a:spLocks noGrp="1"/>
           </p:cNvSpPr>
@@ -8931,7 +8931,7 @@
       </p:sp>
       <p:sp>
         <p:nvSpPr>
-          <p:cNvPr id="393369677" name="Subtitle 2"/>
+          <p:cNvPr id="201736853" name="Subtitle 2"/>
           <p:cNvSpPr>
             <a:spLocks noGrp="1"/>
           </p:cNvSpPr>
@@ -9065,7 +9065,7 @@
       </p:grpSpPr>
       <p:sp>
         <p:nvSpPr>
-          <p:cNvPr id="786564723" name="Title 1"/>
+          <p:cNvPr id="548939555" name="Title 1"/>
           <p:cNvSpPr>
             <a:spLocks noGrp="1"/>
           </p:cNvSpPr>
@@ -9105,7 +9105,7 @@
       </p:sp>
       <p:sp>
         <p:nvSpPr>
-          <p:cNvPr id="1010092736" name="Content Placeholder 2"/>
+          <p:cNvPr id="1083937631" name="Content Placeholder 2"/>
           <p:cNvSpPr>
             <a:spLocks noGrp="1"/>
           </p:cNvSpPr>
@@ -9265,7 +9265,7 @@
       </p:grpSpPr>
       <p:sp>
         <p:nvSpPr>
-          <p:cNvPr id="1677337594" name="Title 1"/>
+          <p:cNvPr id="1097043934" name="Title 1"/>
           <p:cNvSpPr>
             <a:spLocks noGrp="1"/>
           </p:cNvSpPr>
@@ -9311,7 +9311,7 @@
       </p:sp>
       <p:sp>
         <p:nvSpPr>
-          <p:cNvPr id="39039846" name="Content Placeholder 2"/>
+          <p:cNvPr id="1738279406" name="Content Placeholder 2"/>
           <p:cNvSpPr>
             <a:spLocks noGrp="1"/>
           </p:cNvSpPr>
@@ -9445,7 +9445,7 @@
       </p:grpSpPr>
       <p:sp>
         <p:nvSpPr>
-          <p:cNvPr id="55868080" name="Title 1"/>
+          <p:cNvPr id="430755090" name="Title 1"/>
           <p:cNvSpPr>
             <a:spLocks noGrp="1"/>
           </p:cNvSpPr>
@@ -9481,7 +9481,7 @@
       </p:sp>
       <p:sp>
         <p:nvSpPr>
-          <p:cNvPr id="2058085066" name="Content Placeholder 2"/>
+          <p:cNvPr id="1718361480" name="Content Placeholder 2"/>
           <p:cNvSpPr>
             <a:spLocks noGrp="1"/>
           </p:cNvSpPr>
@@ -9561,7 +9561,7 @@
       </p:grpSpPr>
       <p:sp>
         <p:nvSpPr>
-          <p:cNvPr id="1381815375" name="Title 1"/>
+          <p:cNvPr id="1498922330" name="Title 1"/>
           <p:cNvSpPr>
             <a:spLocks noGrp="1"/>
           </p:cNvSpPr>
@@ -9607,7 +9607,7 @@
       </p:sp>
       <p:sp>
         <p:nvSpPr>
-          <p:cNvPr id="1408787240" name="Content Placeholder 2"/>
+          <p:cNvPr id="1631128669" name="Content Placeholder 2"/>
           <p:cNvSpPr>
             <a:spLocks noGrp="1"/>
           </p:cNvSpPr>
@@ -9616,9 +9616,9 @@
           </p:nvPr>
         </p:nvSpPr>
         <p:spPr bwMode="auto">
-          <a:xfrm>
+          <a:xfrm flipH="0" flipV="0">
             <a:off x="457200" y="1600200"/>
-            <a:ext cx="8229600" cy="4421188"/>
+            <a:ext cx="5837144" cy="1975578"/>
           </a:xfrm>
         </p:spPr>
         <p:txBody>
@@ -9652,15 +9652,9 @@
             </a:pPr>
             <a:r>
               <a:rPr lang="en-US"/>
-              <a:t>The job is only a job.  A means to an end</a:t>
-            </a:r>
-            <a:endParaRPr/>
-          </a:p>
-          <a:p>
-            <a:pPr>
-              <a:defRPr/>
-            </a:pPr>
-            <a:endParaRPr lang="en-US"/>
+              <a:t>The job is only a job. It’s not just a means to an end.</a:t>
+            </a:r>
+            <a:endParaRPr/>
           </a:p>
         </p:txBody>
       </p:sp>
@@ -9699,7 +9693,7 @@
       </p:grpSpPr>
       <p:sp>
         <p:nvSpPr>
-          <p:cNvPr id="536975600" name="Title 1"/>
+          <p:cNvPr id="1262676159" name="Title 1"/>
           <p:cNvSpPr>
             <a:spLocks noGrp="1"/>
           </p:cNvSpPr>
@@ -9736,7 +9730,7 @@
       </p:sp>
       <p:sp>
         <p:nvSpPr>
-          <p:cNvPr id="305623659" name="Content Placeholder 2"/>
+          <p:cNvPr id="1933405023" name="Content Placeholder 2"/>
           <p:cNvSpPr>
             <a:spLocks noGrp="1"/>
           </p:cNvSpPr>
@@ -9806,7 +9800,7 @@
       </p:grpSpPr>
       <p:sp>
         <p:nvSpPr>
-          <p:cNvPr id="900270359" name="Title 1"/>
+          <p:cNvPr id="188623020" name="Title 1"/>
           <p:cNvSpPr>
             <a:spLocks noGrp="1"/>
           </p:cNvSpPr>
@@ -9843,7 +9837,7 @@
       </p:sp>
       <p:sp>
         <p:nvSpPr>
-          <p:cNvPr id="157776823" name="Content Placeholder 2"/>
+          <p:cNvPr id="2009544258" name="Content Placeholder 2"/>
           <p:cNvSpPr>
             <a:spLocks noGrp="1"/>
           </p:cNvSpPr>
@@ -9931,7 +9925,7 @@
       </p:grpSpPr>
       <p:sp>
         <p:nvSpPr>
-          <p:cNvPr id="1895224598" name="Title 1"/>
+          <p:cNvPr id="1865946291" name="Title 1"/>
           <p:cNvSpPr>
             <a:spLocks noGrp="1"/>
           </p:cNvSpPr>
@@ -9980,7 +9974,7 @@
       </p:sp>
       <p:sp>
         <p:nvSpPr>
-          <p:cNvPr id="1684038950" name="Content Placeholder 2"/>
+          <p:cNvPr id="265249720" name="Content Placeholder 2"/>
           <p:cNvSpPr>
             <a:spLocks noGrp="1"/>
           </p:cNvSpPr>
@@ -10095,7 +10089,7 @@
       </p:grpSpPr>
       <p:sp>
         <p:nvSpPr>
-          <p:cNvPr id="410000028" name="Title 1"/>
+          <p:cNvPr id="557442921" name="Title 1"/>
           <p:cNvSpPr>
             <a:spLocks noGrp="1"/>
           </p:cNvSpPr>
@@ -10141,7 +10135,7 @@
       </p:sp>
       <p:sp>
         <p:nvSpPr>
-          <p:cNvPr id="124205508" name="Content Placeholder 2"/>
+          <p:cNvPr id="1396955562" name="Content Placeholder 2"/>
           <p:cNvSpPr>
             <a:spLocks noGrp="1"/>
           </p:cNvSpPr>
@@ -10231,7 +10225,7 @@
       </p:grpSpPr>
       <p:sp>
         <p:nvSpPr>
-          <p:cNvPr id="178495955" name="Title 1"/>
+          <p:cNvPr id="1904288760" name="Title 1"/>
           <p:cNvSpPr>
             <a:spLocks noGrp="1"/>
           </p:cNvSpPr>
@@ -10277,7 +10271,7 @@
       </p:sp>
       <p:sp>
         <p:nvSpPr>
-          <p:cNvPr id="274066195" name="Content Placeholder 2"/>
+          <p:cNvPr id="962071492" name="Content Placeholder 2"/>
           <p:cNvSpPr>
             <a:spLocks noGrp="1"/>
           </p:cNvSpPr>
@@ -10359,7 +10353,7 @@
       </p:grpSpPr>
       <p:sp>
         <p:nvSpPr>
-          <p:cNvPr id="351910651" name="Title 1"/>
+          <p:cNvPr id="1184710343" name="Title 1"/>
           <p:cNvSpPr>
             <a:spLocks noGrp="1"/>
           </p:cNvSpPr>
@@ -10405,7 +10399,7 @@
       </p:sp>
       <p:sp>
         <p:nvSpPr>
-          <p:cNvPr id="1074847192" name="Content Placeholder 2"/>
+          <p:cNvPr id="945991788" name="Content Placeholder 2"/>
           <p:cNvSpPr>
             <a:spLocks noGrp="1"/>
           </p:cNvSpPr>
@@ -10505,7 +10499,7 @@
       </p:grpSpPr>
       <p:sp>
         <p:nvSpPr>
-          <p:cNvPr id="1422469970" name="Title 1"/>
+          <p:cNvPr id="1167011583" name="Title 1"/>
           <p:cNvSpPr>
             <a:spLocks noGrp="1"/>
           </p:cNvSpPr>
@@ -10542,7 +10536,7 @@
       </p:sp>
       <p:sp>
         <p:nvSpPr>
-          <p:cNvPr id="1474849705" name="Content Placeholder 2"/>
+          <p:cNvPr id="496566957" name="Content Placeholder 2"/>
           <p:cNvSpPr>
             <a:spLocks noGrp="1"/>
           </p:cNvSpPr>
@@ -10628,7 +10622,7 @@
       </p:grpSpPr>
       <p:sp>
         <p:nvSpPr>
-          <p:cNvPr id="1541515367" name="Title 1"/>
+          <p:cNvPr id="641322279" name="Title 1"/>
           <p:cNvSpPr>
             <a:spLocks noGrp="1"/>
           </p:cNvSpPr>
@@ -10674,7 +10668,7 @@
       </p:sp>
       <p:sp>
         <p:nvSpPr>
-          <p:cNvPr id="1628706970" name="Content Placeholder 2"/>
+          <p:cNvPr id="1013932165" name="Content Placeholder 2"/>
           <p:cNvSpPr>
             <a:spLocks noGrp="1"/>
           </p:cNvSpPr>
@@ -10766,7 +10760,7 @@
       </p:grpSpPr>
       <p:sp>
         <p:nvSpPr>
-          <p:cNvPr id="1989041308" name="Title 1"/>
+          <p:cNvPr id="1514326351" name="Title 1"/>
           <p:cNvSpPr>
             <a:spLocks noGrp="1"/>
           </p:cNvSpPr>
@@ -10812,7 +10806,7 @@
       </p:sp>
       <p:sp>
         <p:nvSpPr>
-          <p:cNvPr id="478537645" name="Content Placeholder 2"/>
+          <p:cNvPr id="1671796815" name="Content Placeholder 2"/>
           <p:cNvSpPr>
             <a:spLocks noGrp="1"/>
           </p:cNvSpPr>
@@ -10900,7 +10894,7 @@
       </p:grpSpPr>
       <p:sp>
         <p:nvSpPr>
-          <p:cNvPr id="990153263" name="Title 1"/>
+          <p:cNvPr id="1796746525" name="Title 1"/>
           <p:cNvSpPr>
             <a:spLocks noGrp="1"/>
           </p:cNvSpPr>
@@ -10946,7 +10940,7 @@
       </p:sp>
       <p:sp>
         <p:nvSpPr>
-          <p:cNvPr id="1308621619" name="Content Placeholder 2"/>
+          <p:cNvPr id="328663589" name="Content Placeholder 2"/>
           <p:cNvSpPr>
             <a:spLocks noGrp="1"/>
           </p:cNvSpPr>
@@ -11044,7 +11038,7 @@
       </p:grpSpPr>
       <p:sp>
         <p:nvSpPr>
-          <p:cNvPr id="948553403" name="Title 1"/>
+          <p:cNvPr id="653620515" name="Title 1"/>
           <p:cNvSpPr>
             <a:spLocks noGrp="1"/>
           </p:cNvSpPr>
@@ -11081,7 +11075,7 @@
       </p:sp>
       <p:sp>
         <p:nvSpPr>
-          <p:cNvPr id="1798631159" name="Content Placeholder 2"/>
+          <p:cNvPr id="1249122334" name="Content Placeholder 2"/>
           <p:cNvSpPr>
             <a:spLocks noGrp="1"/>
           </p:cNvSpPr>
@@ -11179,7 +11173,7 @@
       </p:grpSpPr>
       <p:sp>
         <p:nvSpPr>
-          <p:cNvPr id="1334453698" name="Title 1"/>
+          <p:cNvPr id="329483170" name="Title 1"/>
           <p:cNvSpPr>
             <a:spLocks noGrp="1"/>
           </p:cNvSpPr>
@@ -11225,7 +11219,7 @@
       </p:sp>
       <p:sp>
         <p:nvSpPr>
-          <p:cNvPr id="212568348" name="Content Placeholder 2"/>
+          <p:cNvPr id="82143530" name="Content Placeholder 2"/>
           <p:cNvSpPr>
             <a:spLocks noGrp="1"/>
           </p:cNvSpPr>
@@ -11311,7 +11305,7 @@
       </p:grpSpPr>
       <p:sp>
         <p:nvSpPr>
-          <p:cNvPr id="2117068779" name="Title 1"/>
+          <p:cNvPr id="2023514101" name="Title 1"/>
           <p:cNvSpPr>
             <a:spLocks noGrp="1"/>
           </p:cNvSpPr>
@@ -11357,7 +11351,7 @@
       </p:sp>
       <p:sp>
         <p:nvSpPr>
-          <p:cNvPr id="1572077615" name="Content Placeholder 2"/>
+          <p:cNvPr id="39921519" name="Content Placeholder 2"/>
           <p:cNvSpPr>
             <a:spLocks noGrp="1"/>
           </p:cNvSpPr>
@@ -11437,7 +11431,7 @@
       </p:grpSpPr>
       <p:sp>
         <p:nvSpPr>
-          <p:cNvPr id="560787591" name="TextBox 1"/>
+          <p:cNvPr id="800752254" name="TextBox 1"/>
           <p:cNvSpPr txBox="1"/>
           <p:nvPr/>
         </p:nvSpPr>
@@ -11470,7 +11464,7 @@
       </p:sp>
       <p:graphicFrame>
         <p:nvGraphicFramePr>
-          <p:cNvPr id="1813226894" name="Content Placeholder 4"/>
+          <p:cNvPr id="1609718872" name="Content Placeholder 4"/>
           <p:cNvGraphicFramePr>
             <a:graphicFrameLocks xmlns:a="http://schemas.openxmlformats.org/drawingml/2006/main" noGrp="1"/>
           </p:cNvGraphicFramePr>
@@ -12235,7 +12229,7 @@
       </p:grpSpPr>
       <p:sp>
         <p:nvSpPr>
-          <p:cNvPr id="1068168949" name="Title 1"/>
+          <p:cNvPr id="499976675" name="Title 1"/>
           <p:cNvSpPr>
             <a:spLocks noGrp="1"/>
           </p:cNvSpPr>
@@ -12271,7 +12265,7 @@
       </p:sp>
       <p:sp>
         <p:nvSpPr>
-          <p:cNvPr id="125349906" name="Content Placeholder 2"/>
+          <p:cNvPr id="424609867" name="Content Placeholder 2"/>
           <p:cNvSpPr>
             <a:spLocks noGrp="1"/>
           </p:cNvSpPr>
@@ -12448,7 +12442,7 @@
       </p:grpSpPr>
       <p:sp>
         <p:nvSpPr>
-          <p:cNvPr id="1594411708" name="TextBox 1"/>
+          <p:cNvPr id="991908759" name="TextBox 1"/>
           <p:cNvSpPr txBox="1"/>
           <p:nvPr/>
         </p:nvSpPr>
@@ -12536,7 +12530,7 @@
       </p:grpSpPr>
       <p:sp>
         <p:nvSpPr>
-          <p:cNvPr id="2004417773" name="Title 1"/>
+          <p:cNvPr id="1223333591" name="Title 1"/>
           <p:cNvSpPr>
             <a:spLocks noGrp="1"/>
           </p:cNvSpPr>
@@ -12562,7 +12556,7 @@
       </p:sp>
       <p:sp>
         <p:nvSpPr>
-          <p:cNvPr id="1392543394" name="Content Placeholder 2"/>
+          <p:cNvPr id="1847129955" name="Content Placeholder 2"/>
           <p:cNvSpPr>
             <a:spLocks noGrp="1"/>
           </p:cNvSpPr>
@@ -12692,7 +12686,7 @@
       </p:grpSpPr>
       <p:sp>
         <p:nvSpPr>
-          <p:cNvPr id="870869798" name="Title 1"/>
+          <p:cNvPr id="786344668" name="Title 1"/>
           <p:cNvSpPr>
             <a:spLocks noGrp="1"/>
           </p:cNvSpPr>
@@ -12723,7 +12717,7 @@
       </p:sp>
       <p:sp>
         <p:nvSpPr>
-          <p:cNvPr id="1374490081" name="Content Placeholder 2"/>
+          <p:cNvPr id="1760041486" name="Content Placeholder 2"/>
           <p:cNvSpPr>
             <a:spLocks noGrp="1"/>
           </p:cNvSpPr>
@@ -12904,7 +12898,7 @@
       </p:sp>
       <p:sp>
         <p:nvSpPr>
-          <p:cNvPr id="1176389267" name="Rectangle 3"/>
+          <p:cNvPr id="1045474336" name="Rectangle 3"/>
           <p:cNvSpPr/>
           <p:nvPr/>
         </p:nvSpPr>
@@ -12987,7 +12981,7 @@
       </p:grpSpPr>
       <p:sp>
         <p:nvSpPr>
-          <p:cNvPr id="1506922086" name="Title 1"/>
+          <p:cNvPr id="734530272" name="Title 1"/>
           <p:cNvSpPr>
             <a:spLocks noGrp="1"/>
           </p:cNvSpPr>
@@ -13015,7 +13009,7 @@
       </p:sp>
       <p:sp>
         <p:nvSpPr>
-          <p:cNvPr id="336172441" name="Content Placeholder 2"/>
+          <p:cNvPr id="372314294" name="Content Placeholder 2"/>
           <p:cNvSpPr>
             <a:spLocks noGrp="1"/>
           </p:cNvSpPr>
@@ -13126,7 +13120,7 @@
       </p:grpSpPr>
       <p:sp>
         <p:nvSpPr>
-          <p:cNvPr id="1508895886" name="Title 1"/>
+          <p:cNvPr id="872964125" name="Title 1"/>
           <p:cNvSpPr>
             <a:spLocks noGrp="1"/>
           </p:cNvSpPr>
@@ -13157,7 +13151,7 @@
       </p:sp>
       <p:pic>
         <p:nvPicPr>
-          <p:cNvPr id="1189919623" name="Picture 2"/>
+          <p:cNvPr id="1839429064" name="Picture 2"/>
           <p:cNvPicPr>
             <a:picLocks noChangeAspect="1" noChangeArrowheads="1" noGrp="1"/>
           </p:cNvPicPr>
@@ -13219,7 +13213,7 @@
       </p:grpSpPr>
       <p:pic>
         <p:nvPicPr>
-          <p:cNvPr id="1836474907" name="Picture 2"/>
+          <p:cNvPr id="1970657506" name="Picture 2"/>
           <p:cNvPicPr>
             <a:picLocks noChangeAspect="1" noChangeArrowheads="1" noGrp="1"/>
           </p:cNvPicPr>
@@ -13281,7 +13275,7 @@
       </p:grpSpPr>
       <p:sp>
         <p:nvSpPr>
-          <p:cNvPr id="1438982203" name="Title 1"/>
+          <p:cNvPr id="2024699189" name="Title 1"/>
           <p:cNvSpPr>
             <a:spLocks noGrp="1"/>
           </p:cNvSpPr>
@@ -13314,7 +13308,7 @@
       </p:sp>
       <p:sp>
         <p:nvSpPr>
-          <p:cNvPr id="1175744932" name="Content Placeholder 2"/>
+          <p:cNvPr id="25148564" name="Content Placeholder 2"/>
           <p:cNvSpPr>
             <a:spLocks noGrp="1"/>
           </p:cNvSpPr>
@@ -13426,7 +13420,7 @@
       </p:grpSpPr>
       <p:sp>
         <p:nvSpPr>
-          <p:cNvPr id="329887814" name="Title 1"/>
+          <p:cNvPr id="844447036" name="Title 1"/>
           <p:cNvSpPr>
             <a:spLocks noGrp="1"/>
           </p:cNvSpPr>
@@ -13462,7 +13456,7 @@
       </p:sp>
       <p:sp>
         <p:nvSpPr>
-          <p:cNvPr id="1130831829" name="Content Placeholder 2"/>
+          <p:cNvPr id="1043734554" name="Content Placeholder 2"/>
           <p:cNvSpPr>
             <a:spLocks noGrp="1"/>
           </p:cNvSpPr>
@@ -13624,7 +13618,7 @@
       </p:grpSpPr>
       <p:sp>
         <p:nvSpPr>
-          <p:cNvPr id="39154779" name="Title 1"/>
+          <p:cNvPr id="1188117794" name="Title 1"/>
           <p:cNvSpPr>
             <a:spLocks noGrp="1"/>
           </p:cNvSpPr>
@@ -13650,7 +13644,7 @@
       </p:sp>
       <p:sp>
         <p:nvSpPr>
-          <p:cNvPr id="795827958" name="Content Placeholder 2"/>
+          <p:cNvPr id="344702333" name="Content Placeholder 2"/>
           <p:cNvSpPr>
             <a:spLocks noGrp="1"/>
           </p:cNvSpPr>
@@ -13868,7 +13862,7 @@
       </p:grpSpPr>
       <p:pic>
         <p:nvPicPr>
-          <p:cNvPr id="273951695" name="Picture 5"/>
+          <p:cNvPr id="1608462334" name="Picture 5"/>
           <p:cNvPicPr>
             <a:picLocks noChangeAspect="1"/>
           </p:cNvPicPr>
@@ -13890,7 +13884,7 @@
       </p:pic>
       <p:pic>
         <p:nvPicPr>
-          <p:cNvPr id="123675996" name="Picture 7"/>
+          <p:cNvPr id="2118182673" name="Picture 7"/>
           <p:cNvPicPr>
             <a:picLocks noChangeAspect="1"/>
           </p:cNvPicPr>
@@ -13912,7 +13906,7 @@
       </p:pic>
       <p:pic>
         <p:nvPicPr>
-          <p:cNvPr id="817838357" name="Picture 9"/>
+          <p:cNvPr id="379565034" name="Picture 9"/>
           <p:cNvPicPr>
             <a:picLocks noChangeAspect="1"/>
           </p:cNvPicPr>
@@ -13934,7 +13928,7 @@
       </p:pic>
       <p:pic>
         <p:nvPicPr>
-          <p:cNvPr id="2037486324" name="Picture 1"/>
+          <p:cNvPr id="1227135668" name="Picture 1"/>
           <p:cNvPicPr>
             <a:picLocks noChangeAspect="1"/>
           </p:cNvPicPr>
@@ -13961,7 +13955,7 @@
       </p:pic>
       <p:pic>
         <p:nvPicPr>
-          <p:cNvPr id="1571935269" name="Picture 2"/>
+          <p:cNvPr id="1342982594" name="Picture 2"/>
           <p:cNvPicPr>
             <a:picLocks noChangeAspect="1"/>
           </p:cNvPicPr>
@@ -13988,7 +13982,7 @@
       </p:pic>
       <p:pic>
         <p:nvPicPr>
-          <p:cNvPr id="623790425" name="Picture 4"/>
+          <p:cNvPr id="1371215269" name="Picture 4"/>
           <p:cNvPicPr>
             <a:picLocks noChangeAspect="1"/>
           </p:cNvPicPr>
@@ -14015,7 +14009,7 @@
       </p:pic>
       <p:pic>
         <p:nvPicPr>
-          <p:cNvPr id="114624392" name="Picture 10"/>
+          <p:cNvPr id="161270198" name="Picture 10"/>
           <p:cNvPicPr>
             <a:picLocks noChangeAspect="1"/>
           </p:cNvPicPr>
@@ -14075,7 +14069,7 @@
       </p:grpSpPr>
       <p:sp>
         <p:nvSpPr>
-          <p:cNvPr id="148247246" name="Title 1"/>
+          <p:cNvPr id="563545452" name="Title 1"/>
           <p:cNvSpPr>
             <a:spLocks noGrp="1"/>
           </p:cNvSpPr>
@@ -14101,7 +14095,7 @@
       </p:sp>
       <p:sp>
         <p:nvSpPr>
-          <p:cNvPr id="635624064" name="Content Placeholder 2"/>
+          <p:cNvPr id="1714500157" name="Content Placeholder 2"/>
           <p:cNvSpPr>
             <a:spLocks noGrp="1"/>
           </p:cNvSpPr>
@@ -14194,7 +14188,7 @@
       </p:grpSpPr>
       <p:sp>
         <p:nvSpPr>
-          <p:cNvPr id="256717525" name="Title 3"/>
+          <p:cNvPr id="432774040" name="Title 3"/>
           <p:cNvSpPr>
             <a:spLocks noGrp="1"/>
           </p:cNvSpPr>
@@ -14220,7 +14214,7 @@
       </p:sp>
       <p:pic>
         <p:nvPicPr>
-          <p:cNvPr id="1670750464" name="Picture 2"/>
+          <p:cNvPr id="339999135" name="Picture 2"/>
           <p:cNvPicPr>
             <a:picLocks noChangeAspect="1" noChangeArrowheads="1"/>
           </p:cNvPicPr>
@@ -14280,7 +14274,7 @@
       </p:grpSpPr>
       <p:sp>
         <p:nvSpPr>
-          <p:cNvPr id="1210822761" name="Content Placeholder 2"/>
+          <p:cNvPr id="1836832458" name="Content Placeholder 2"/>
           <p:cNvSpPr>
             <a:spLocks noGrp="1"/>
           </p:cNvSpPr>
@@ -14452,7 +14446,7 @@
       </p:grpSpPr>
       <p:sp>
         <p:nvSpPr>
-          <p:cNvPr id="747074955" name="Content Placeholder 2"/>
+          <p:cNvPr id="1737402350" name="Content Placeholder 2"/>
           <p:cNvSpPr>
             <a:spLocks noGrp="1"/>
           </p:cNvSpPr>
@@ -14491,7 +14485,7 @@
       </p:sp>
       <p:sp>
         <p:nvSpPr>
-          <p:cNvPr id="2130535071" name="Content Placeholder 2"/>
+          <p:cNvPr id="1527867634" name="Content Placeholder 2"/>
           <p:cNvSpPr txBox="1"/>
           <p:nvPr/>
         </p:nvSpPr>
@@ -14822,7 +14816,7 @@
       </p:grpSpPr>
       <p:sp>
         <p:nvSpPr>
-          <p:cNvPr id="150333537" name="Title 1"/>
+          <p:cNvPr id="633766688" name="Title 1"/>
           <p:cNvSpPr>
             <a:spLocks noGrp="1"/>
           </p:cNvSpPr>
@@ -14848,7 +14842,7 @@
       </p:sp>
       <p:sp>
         <p:nvSpPr>
-          <p:cNvPr id="1684121760" name="Content Placeholder 2"/>
+          <p:cNvPr id="2134434319" name="Content Placeholder 2"/>
           <p:cNvSpPr>
             <a:spLocks noGrp="1"/>
           </p:cNvSpPr>
@@ -14965,7 +14959,7 @@
       </p:grpSpPr>
       <p:sp>
         <p:nvSpPr>
-          <p:cNvPr id="1883871152" name="Rectangle 3"/>
+          <p:cNvPr id="1845247414" name="Rectangle 3"/>
           <p:cNvSpPr>
             <a:spLocks noChangeArrowheads="1" noGrp="1"/>
           </p:cNvSpPr>
@@ -15079,7 +15073,7 @@
       </p:sp>
       <p:sp>
         <p:nvSpPr>
-          <p:cNvPr id="843760652" name="Rectangle 2"/>
+          <p:cNvPr id="467219846" name="Rectangle 2"/>
           <p:cNvSpPr>
             <a:spLocks noChangeArrowheads="1" noGrp="1"/>
           </p:cNvSpPr>
@@ -15137,7 +15131,7 @@
       </p:sp>
       <p:sp>
         <p:nvSpPr>
-          <p:cNvPr id="672917634" name="Date Placeholder 3"/>
+          <p:cNvPr id="1991013807" name="Date Placeholder 3"/>
           <p:cNvSpPr txBox="1">
             <a:spLocks noGrp="1"/>
           </p:cNvSpPr>
@@ -15268,7 +15262,7 @@
       </p:sp>
       <p:sp>
         <p:nvSpPr>
-          <p:cNvPr id="903927550" name="Footer Placeholder 4"/>
+          <p:cNvPr id="139353353" name="Footer Placeholder 4"/>
           <p:cNvSpPr txBox="1">
             <a:spLocks noGrp="1"/>
           </p:cNvSpPr>
@@ -15399,7 +15393,7 @@
       </p:sp>
       <p:sp>
         <p:nvSpPr>
-          <p:cNvPr id="1984161202" name="Slide Number Placeholder 5"/>
+          <p:cNvPr id="1767405987" name="Slide Number Placeholder 5"/>
           <p:cNvSpPr txBox="1">
             <a:spLocks noGrp="1"/>
           </p:cNvSpPr>
@@ -15569,7 +15563,7 @@
       </p:grpSpPr>
       <p:sp>
         <p:nvSpPr>
-          <p:cNvPr id="919247368" name="Rectangle 3"/>
+          <p:cNvPr id="1914089340" name="Rectangle 3"/>
           <p:cNvSpPr>
             <a:spLocks noChangeArrowheads="1" noGrp="1"/>
           </p:cNvSpPr>
@@ -15907,7 +15901,7 @@
       </p:sp>
       <p:sp>
         <p:nvSpPr>
-          <p:cNvPr id="1796245405" name="Rectangle 2"/>
+          <p:cNvPr id="613349958" name="Rectangle 2"/>
           <p:cNvSpPr>
             <a:spLocks noChangeArrowheads="1" noGrp="1"/>
           </p:cNvSpPr>
@@ -15957,7 +15951,7 @@
       </p:sp>
       <p:sp>
         <p:nvSpPr>
-          <p:cNvPr id="1094984092" name="Date Placeholder 3"/>
+          <p:cNvPr id="2013474021" name="Date Placeholder 3"/>
           <p:cNvSpPr txBox="1">
             <a:spLocks noGrp="1"/>
           </p:cNvSpPr>
@@ -16088,7 +16082,7 @@
       </p:sp>
       <p:sp>
         <p:nvSpPr>
-          <p:cNvPr id="1621791679" name="Footer Placeholder 4"/>
+          <p:cNvPr id="177370108" name="Footer Placeholder 4"/>
           <p:cNvSpPr txBox="1">
             <a:spLocks noGrp="1"/>
           </p:cNvSpPr>
@@ -16219,7 +16213,7 @@
       </p:sp>
       <p:sp>
         <p:nvSpPr>
-          <p:cNvPr id="306444120" name="Slide Number Placeholder 5"/>
+          <p:cNvPr id="1544330103" name="Slide Number Placeholder 5"/>
           <p:cNvSpPr txBox="1">
             <a:spLocks noGrp="1"/>
           </p:cNvSpPr>
@@ -16389,7 +16383,7 @@
       </p:grpSpPr>
       <p:sp>
         <p:nvSpPr>
-          <p:cNvPr id="1377835961" name="Title 1"/>
+          <p:cNvPr id="380614776" name="Title 1"/>
           <p:cNvSpPr>
             <a:spLocks noGrp="1"/>
           </p:cNvSpPr>
@@ -16417,7 +16411,7 @@
       </p:sp>
       <p:sp>
         <p:nvSpPr>
-          <p:cNvPr id="331877361" name="Subtitle 2"/>
+          <p:cNvPr id="1263081008" name="Subtitle 2"/>
           <p:cNvSpPr>
             <a:spLocks noGrp="1"/>
           </p:cNvSpPr>
@@ -16493,7 +16487,7 @@
       </p:grpSpPr>
       <p:sp>
         <p:nvSpPr>
-          <p:cNvPr id="1671744844" name="Title 1"/>
+          <p:cNvPr id="477866419" name="Title 1"/>
           <p:cNvSpPr>
             <a:spLocks noGrp="1"/>
           </p:cNvSpPr>
@@ -16519,7 +16513,7 @@
       </p:sp>
       <p:sp>
         <p:nvSpPr>
-          <p:cNvPr id="1932831253" name="Content Placeholder 2"/>
+          <p:cNvPr id="910355509" name="Content Placeholder 2"/>
           <p:cNvSpPr>
             <a:spLocks noGrp="1"/>
           </p:cNvSpPr>
@@ -16578,7 +16572,7 @@
       </p:grpSpPr>
       <p:sp>
         <p:nvSpPr>
-          <p:cNvPr id="350152881" name="Title 1"/>
+          <p:cNvPr id="1638229498" name="Title 1"/>
           <p:cNvSpPr>
             <a:spLocks noGrp="1"/>
           </p:cNvSpPr>
@@ -16617,7 +16611,7 @@
       </p:sp>
       <p:sp>
         <p:nvSpPr>
-          <p:cNvPr id="313642303" name="Content Placeholder 2"/>
+          <p:cNvPr id="83450369" name="Content Placeholder 2"/>
           <p:cNvSpPr>
             <a:spLocks noGrp="1"/>
           </p:cNvSpPr>
@@ -16716,7 +16710,7 @@
       </p:grpSpPr>
       <p:sp>
         <p:nvSpPr>
-          <p:cNvPr id="1280572196" name="Title 1"/>
+          <p:cNvPr id="1464327136" name="Title 1"/>
           <p:cNvSpPr>
             <a:spLocks noGrp="1"/>
           </p:cNvSpPr>
@@ -16747,7 +16741,7 @@
       </p:sp>
       <p:sp>
         <p:nvSpPr>
-          <p:cNvPr id="25430007" name="Content Placeholder 2"/>
+          <p:cNvPr id="945557788" name="Content Placeholder 2"/>
           <p:cNvSpPr>
             <a:spLocks noGrp="1"/>
           </p:cNvSpPr>
@@ -16778,7 +16772,7 @@
       </p:sp>
       <p:sp>
         <p:nvSpPr>
-          <p:cNvPr id="821003339" name="Content Placeholder 7"/>
+          <p:cNvPr id="512872000" name="Content Placeholder 7"/>
           <p:cNvSpPr>
             <a:spLocks noGrp="1"/>
           </p:cNvSpPr>
@@ -16912,7 +16906,7 @@
       </p:grpSpPr>
       <p:sp>
         <p:nvSpPr>
-          <p:cNvPr id="1553538969" name="Title 1"/>
+          <p:cNvPr id="905529904" name="Title 1"/>
           <p:cNvSpPr>
             <a:spLocks noGrp="1"/>
           </p:cNvSpPr>
@@ -16956,7 +16950,7 @@
       </p:sp>
       <p:sp>
         <p:nvSpPr>
-          <p:cNvPr id="256341987" name="Content Placeholder 2"/>
+          <p:cNvPr id="1173115668" name="Content Placeholder 2"/>
           <p:cNvSpPr>
             <a:spLocks noGrp="1"/>
           </p:cNvSpPr>
@@ -17118,7 +17112,7 @@
       </p:grpSpPr>
       <p:sp>
         <p:nvSpPr>
-          <p:cNvPr id="582336081" name="Title 1"/>
+          <p:cNvPr id="1536635288" name="Title 1"/>
           <p:cNvSpPr>
             <a:spLocks noGrp="1"/>
           </p:cNvSpPr>
@@ -17144,7 +17138,7 @@
       </p:sp>
       <p:sp>
         <p:nvSpPr>
-          <p:cNvPr id="1841869880" name="Content Placeholder 2"/>
+          <p:cNvPr id="768672024" name="Content Placeholder 2"/>
           <p:cNvSpPr>
             <a:spLocks noGrp="1"/>
           </p:cNvSpPr>
@@ -17405,7 +17399,7 @@
       </p:grpSpPr>
       <p:sp>
         <p:nvSpPr>
-          <p:cNvPr id="1314857676" name="Title 1"/>
+          <p:cNvPr id="914092102" name="Title 1"/>
           <p:cNvSpPr>
             <a:spLocks noGrp="1"/>
           </p:cNvSpPr>
@@ -17441,7 +17435,7 @@
       </p:sp>
       <p:sp>
         <p:nvSpPr>
-          <p:cNvPr id="1257996397" name="Content Placeholder 2"/>
+          <p:cNvPr id="560210873" name="Content Placeholder 2"/>
           <p:cNvSpPr>
             <a:spLocks noGrp="1"/>
           </p:cNvSpPr>
